--- a/bench/family_definition_visual.pptx
+++ b/bench/family_definition_visual.pptx
@@ -10,6 +10,8 @@
     <p:sldId id="258" r:id="rId9"/>
     <p:sldId id="259" r:id="rId10"/>
     <p:sldId id="260" r:id="rId11"/>
+    <p:sldId id="261" r:id="rId12"/>
+    <p:sldId id="262" r:id="rId13"/>
   </p:sldIdLst>
   <p:sldSz cx="12188952" cy="6858000" type="screen4x3"/>
   <p:notesSz cx="6858000" cy="9144000"/>
@@ -3311,6 +3313,118 @@
               </a:defRPr>
             </a:pPr>
             <a:r>
+              <a:t>How a read aligns: the number 'de', and what a 'tie' is</a:t>
+            </a:r>
+          </a:p>
+        </p:txBody>
+      </p:sp>
+      <p:pic>
+        <p:nvPicPr>
+          <p:cNvPr id="3" name="Picture 2" descr="fig4_align.png"/>
+          <p:cNvPicPr>
+            <a:picLocks noChangeAspect="1"/>
+          </p:cNvPicPr>
+          <p:nvPr/>
+        </p:nvPicPr>
+        <p:blipFill>
+          <a:blip r:embed="rId2"/>
+          <a:stretch>
+            <a:fillRect/>
+          </a:stretch>
+        </p:blipFill>
+        <p:spPr>
+          <a:xfrm>
+            <a:off x="425196" y="914400"/>
+            <a:ext cx="11338560" cy="4023797"/>
+          </a:xfrm>
+          <a:prstGeom prst="rect">
+            <a:avLst/>
+          </a:prstGeom>
+        </p:spPr>
+      </p:pic>
+      <p:sp>
+        <p:nvSpPr>
+          <p:cNvPr id="4" name="TextBox 3"/>
+          <p:cNvSpPr txBox="1"/>
+          <p:nvPr/>
+        </p:nvSpPr>
+        <p:spPr>
+          <a:xfrm>
+            <a:off x="548640" y="6080760"/>
+            <a:ext cx="11064240" cy="640080"/>
+          </a:xfrm>
+          <a:prstGeom prst="rect">
+            <a:avLst/>
+          </a:prstGeom>
+          <a:noFill/>
+        </p:spPr>
+        <p:txBody>
+          <a:bodyPr wrap="square">
+            <a:spAutoFit/>
+          </a:bodyPr>
+          <a:lstStyle/>
+          <a:p>
+            <a:pPr algn="ctr">
+              <a:defRPr sz="1500" b="1">
+                <a:solidFill>
+                  <a:srgbClr val="D96B27"/>
+                </a:solidFill>
+              </a:defRPr>
+            </a:pPr>
+            <a:r>
+              <a:t>minimap2 aligns the read to each copy; de = differences per base. Two copies within Δ of each other = a tie = one ~R vote.</a:t>
+            </a:r>
+          </a:p>
+        </p:txBody>
+      </p:sp>
+    </p:spTree>
+  </p:cSld>
+  <p:clrMapOvr>
+    <a:masterClrMapping/>
+  </p:clrMapOvr>
+</p:sld>
+</file>
+
+<file path=ppt/slides/slide4.xml><?xml version="1.0" encoding="utf-8"?>
+<p:sld xmlns:a="http://schemas.openxmlformats.org/drawingml/2006/main" xmlns:p="http://schemas.openxmlformats.org/presentationml/2006/main" xmlns:r="http://schemas.openxmlformats.org/officeDocument/2006/relationships">
+  <p:cSld>
+    <p:spTree>
+      <p:nvGrpSpPr>
+        <p:cNvPr id="1" name=""/>
+        <p:cNvGrpSpPr/>
+        <p:nvPr/>
+      </p:nvGrpSpPr>
+      <p:grpSpPr/>
+      <p:sp>
+        <p:nvSpPr>
+          <p:cNvPr id="2" name="TextBox 1"/>
+          <p:cNvSpPr txBox="1"/>
+          <p:nvPr/>
+        </p:nvSpPr>
+        <p:spPr>
+          <a:xfrm>
+            <a:off x="457200" y="164592"/>
+            <a:ext cx="11247120" cy="640080"/>
+          </a:xfrm>
+          <a:prstGeom prst="rect">
+            <a:avLst/>
+          </a:prstGeom>
+          <a:noFill/>
+        </p:spPr>
+        <p:txBody>
+          <a:bodyPr wrap="none">
+            <a:spAutoFit/>
+          </a:bodyPr>
+          <a:lstStyle/>
+          <a:p>
+            <a:pPr>
+              <a:defRPr sz="2400" b="1">
+                <a:solidFill>
+                  <a:srgbClr val="1F2D5A"/>
+                </a:solidFill>
+              </a:defRPr>
+            </a:pPr>
+            <a:r>
               <a:t>Sum the exons of all isoforms  →  one copy model</a:t>
             </a:r>
           </a:p>
@@ -3383,7 +3497,119 @@
 </p:sld>
 </file>
 
-<file path=ppt/slides/slide4.xml><?xml version="1.0" encoding="utf-8"?>
+<file path=ppt/slides/slide5.xml><?xml version="1.0" encoding="utf-8"?>
+<p:sld xmlns:a="http://schemas.openxmlformats.org/drawingml/2006/main" xmlns:p="http://schemas.openxmlformats.org/presentationml/2006/main" xmlns:r="http://schemas.openxmlformats.org/officeDocument/2006/relationships">
+  <p:cSld>
+    <p:spTree>
+      <p:nvGrpSpPr>
+        <p:cNvPr id="1" name=""/>
+        <p:cNvGrpSpPr/>
+        <p:nvPr/>
+      </p:nvGrpSpPr>
+      <p:grpSpPr/>
+      <p:sp>
+        <p:nvSpPr>
+          <p:cNvPr id="2" name="TextBox 1"/>
+          <p:cNvSpPr txBox="1"/>
+          <p:nvPr/>
+        </p:nvSpPr>
+        <p:spPr>
+          <a:xfrm>
+            <a:off x="457200" y="164592"/>
+            <a:ext cx="11247120" cy="640080"/>
+          </a:xfrm>
+          <a:prstGeom prst="rect">
+            <a:avLst/>
+          </a:prstGeom>
+          <a:noFill/>
+        </p:spPr>
+        <p:txBody>
+          <a:bodyPr wrap="none">
+            <a:spAutoFit/>
+          </a:bodyPr>
+          <a:lstStyle/>
+          <a:p>
+            <a:pPr>
+              <a:defRPr sz="2400" b="1">
+                <a:solidFill>
+                  <a:srgbClr val="1F2D5A"/>
+                </a:solidFill>
+              </a:defRPr>
+            </a:pPr>
+            <a:r>
+              <a:t>How we align the copies: a dot-plot  →  backbone or not (~B)</a:t>
+            </a:r>
+          </a:p>
+        </p:txBody>
+      </p:sp>
+      <p:pic>
+        <p:nvPicPr>
+          <p:cNvPr id="3" name="Picture 2" descr="fig5_dotplot.png"/>
+          <p:cNvPicPr>
+            <a:picLocks noChangeAspect="1"/>
+          </p:cNvPicPr>
+          <p:nvPr/>
+        </p:nvPicPr>
+        <p:blipFill>
+          <a:blip r:embed="rId2"/>
+          <a:stretch>
+            <a:fillRect/>
+          </a:stretch>
+        </p:blipFill>
+        <p:spPr>
+          <a:xfrm>
+            <a:off x="615051" y="914400"/>
+            <a:ext cx="10958850" cy="4892040"/>
+          </a:xfrm>
+          <a:prstGeom prst="rect">
+            <a:avLst/>
+          </a:prstGeom>
+        </p:spPr>
+      </p:pic>
+      <p:sp>
+        <p:nvSpPr>
+          <p:cNvPr id="4" name="TextBox 3"/>
+          <p:cNvSpPr txBox="1"/>
+          <p:nvPr/>
+        </p:nvSpPr>
+        <p:spPr>
+          <a:xfrm>
+            <a:off x="548640" y="6080760"/>
+            <a:ext cx="11064240" cy="640080"/>
+          </a:xfrm>
+          <a:prstGeom prst="rect">
+            <a:avLst/>
+          </a:prstGeom>
+          <a:noFill/>
+        </p:spPr>
+        <p:txBody>
+          <a:bodyPr wrap="square">
+            <a:spAutoFit/>
+          </a:bodyPr>
+          <a:lstStyle/>
+          <a:p>
+            <a:pPr algn="ctr">
+              <a:defRPr sz="1500" b="1">
+                <a:solidFill>
+                  <a:srgbClr val="D96B27"/>
+                </a:solidFill>
+              </a:defRPr>
+            </a:pPr>
+            <a:r>
+              <a:t>Align the copy models to each other; a diagonal = a shared backbone over most of both. Bridge: no diagonal → ~B fails.</a:t>
+            </a:r>
+          </a:p>
+        </p:txBody>
+      </p:sp>
+    </p:spTree>
+  </p:cSld>
+  <p:clrMapOvr>
+    <a:masterClrMapping/>
+  </p:clrMapOvr>
+</p:sld>
+</file>
+
+<file path=ppt/slides/slide6.xml><?xml version="1.0" encoding="utf-8"?>
 <p:sld xmlns:a="http://schemas.openxmlformats.org/drawingml/2006/main" xmlns:p="http://schemas.openxmlformats.org/presentationml/2006/main" xmlns:r="http://schemas.openxmlformats.org/officeDocument/2006/relationships">
   <p:cSld>
     <p:spTree>
@@ -3495,7 +3721,7 @@
 </p:sld>
 </file>
 
-<file path=ppt/slides/slide5.xml><?xml version="1.0" encoding="utf-8"?>
+<file path=ppt/slides/slide7.xml><?xml version="1.0" encoding="utf-8"?>
 <p:sld xmlns:a="http://schemas.openxmlformats.org/drawingml/2006/main" xmlns:p="http://schemas.openxmlformats.org/presentationml/2006/main" xmlns:r="http://schemas.openxmlformats.org/officeDocument/2006/relationships">
   <p:cSld>
     <p:spTree>

--- a/bench/family_definition_visual.pptx
+++ b/bench/family_definition_visual.pptx
@@ -12,6 +12,11 @@
     <p:sldId id="260" r:id="rId11"/>
     <p:sldId id="261" r:id="rId12"/>
     <p:sldId id="262" r:id="rId13"/>
+    <p:sldId id="263" r:id="rId14"/>
+    <p:sldId id="264" r:id="rId15"/>
+    <p:sldId id="265" r:id="rId16"/>
+    <p:sldId id="266" r:id="rId17"/>
+    <p:sldId id="267" r:id="rId18"/>
   </p:sldIdLst>
   <p:sldSz cx="12188952" cy="6858000" type="screen4x3"/>
   <p:notesSz cx="6858000" cy="9144000"/>
@@ -3161,6 +3166,342 @@
 </p:sld>
 </file>
 
+<file path=ppt/slides/slide10.xml><?xml version="1.0" encoding="utf-8"?>
+<p:sld xmlns:a="http://schemas.openxmlformats.org/drawingml/2006/main" xmlns:p="http://schemas.openxmlformats.org/presentationml/2006/main" xmlns:r="http://schemas.openxmlformats.org/officeDocument/2006/relationships">
+  <p:cSld>
+    <p:spTree>
+      <p:nvGrpSpPr>
+        <p:cNvPr id="1" name=""/>
+        <p:cNvGrpSpPr/>
+        <p:nvPr/>
+      </p:nvGrpSpPr>
+      <p:grpSpPr/>
+      <p:sp>
+        <p:nvSpPr>
+          <p:cNvPr id="2" name="TextBox 1"/>
+          <p:cNvSpPr txBox="1"/>
+          <p:nvPr/>
+        </p:nvSpPr>
+        <p:spPr>
+          <a:xfrm>
+            <a:off x="457200" y="164592"/>
+            <a:ext cx="11247120" cy="640080"/>
+          </a:xfrm>
+          <a:prstGeom prst="rect">
+            <a:avLst/>
+          </a:prstGeom>
+          <a:noFill/>
+        </p:spPr>
+        <p:txBody>
+          <a:bodyPr wrap="none">
+            <a:spAutoFit/>
+          </a:bodyPr>
+          <a:lstStyle/>
+          <a:p>
+            <a:pPr>
+              <a:defRPr sz="2400" b="1">
+                <a:solidFill>
+                  <a:srgbClr val="1F2D5A"/>
+                </a:solidFill>
+              </a:defRPr>
+            </a:pPr>
+            <a:r>
+              <a:t>How the alignment works (minimap2's job, not ours; not Needleman–Wunsch)</a:t>
+            </a:r>
+          </a:p>
+        </p:txBody>
+      </p:sp>
+      <p:pic>
+        <p:nvPicPr>
+          <p:cNvPr id="3" name="Picture 2" descr="fig6_algo.png"/>
+          <p:cNvPicPr>
+            <a:picLocks noChangeAspect="1"/>
+          </p:cNvPicPr>
+          <p:nvPr/>
+        </p:nvPicPr>
+        <p:blipFill>
+          <a:blip r:embed="rId2"/>
+          <a:stretch>
+            <a:fillRect/>
+          </a:stretch>
+        </p:blipFill>
+        <p:spPr>
+          <a:xfrm>
+            <a:off x="425196" y="914400"/>
+            <a:ext cx="11338560" cy="4046663"/>
+          </a:xfrm>
+          <a:prstGeom prst="rect">
+            <a:avLst/>
+          </a:prstGeom>
+        </p:spPr>
+      </p:pic>
+      <p:sp>
+        <p:nvSpPr>
+          <p:cNvPr id="4" name="TextBox 3"/>
+          <p:cNvSpPr txBox="1"/>
+          <p:nvPr/>
+        </p:nvSpPr>
+        <p:spPr>
+          <a:xfrm>
+            <a:off x="548640" y="6080760"/>
+            <a:ext cx="11064240" cy="640080"/>
+          </a:xfrm>
+          <a:prstGeom prst="rect">
+            <a:avLst/>
+          </a:prstGeom>
+          <a:noFill/>
+        </p:spPr>
+        <p:txBody>
+          <a:bodyPr wrap="square">
+            <a:spAutoFit/>
+          </a:bodyPr>
+          <a:lstStyle/>
+          <a:p>
+            <a:pPr algn="ctr">
+              <a:defRPr sz="1500" b="1">
+                <a:solidFill>
+                  <a:srgbClr val="D96B27"/>
+                </a:solidFill>
+              </a:defRPr>
+            </a:pPr>
+            <a:r>
+              <a:t>minimap2 — not us — does seed–chain–align (minimizer seeds → chaining → banded affine-gap DP). We only consume its output.</a:t>
+            </a:r>
+          </a:p>
+        </p:txBody>
+      </p:sp>
+    </p:spTree>
+  </p:cSld>
+  <p:clrMapOvr>
+    <a:masterClrMapping/>
+  </p:clrMapOvr>
+</p:sld>
+</file>
+
+<file path=ppt/slides/slide11.xml><?xml version="1.0" encoding="utf-8"?>
+<p:sld xmlns:a="http://schemas.openxmlformats.org/drawingml/2006/main" xmlns:p="http://schemas.openxmlformats.org/presentationml/2006/main" xmlns:r="http://schemas.openxmlformats.org/officeDocument/2006/relationships">
+  <p:cSld>
+    <p:spTree>
+      <p:nvGrpSpPr>
+        <p:cNvPr id="1" name=""/>
+        <p:cNvGrpSpPr/>
+        <p:nvPr/>
+      </p:nvGrpSpPr>
+      <p:grpSpPr/>
+      <p:sp>
+        <p:nvSpPr>
+          <p:cNvPr id="2" name="TextBox 1"/>
+          <p:cNvSpPr txBox="1"/>
+          <p:nvPr/>
+        </p:nvSpPr>
+        <p:spPr>
+          <a:xfrm>
+            <a:off x="457200" y="164592"/>
+            <a:ext cx="11247120" cy="640080"/>
+          </a:xfrm>
+          <a:prstGeom prst="rect">
+            <a:avLst/>
+          </a:prstGeom>
+          <a:noFill/>
+        </p:spPr>
+        <p:txBody>
+          <a:bodyPr wrap="none">
+            <a:spAutoFit/>
+          </a:bodyPr>
+          <a:lstStyle/>
+          <a:p>
+            <a:pPr>
+              <a:defRPr sz="2400" b="1">
+                <a:solidFill>
+                  <a:srgbClr val="1F2D5A"/>
+                </a:solidFill>
+              </a:defRPr>
+            </a:pPr>
+            <a:r>
+              <a:t>Error or real? — by recurrence across reads</a:t>
+            </a:r>
+          </a:p>
+        </p:txBody>
+      </p:sp>
+      <p:pic>
+        <p:nvPicPr>
+          <p:cNvPr id="3" name="Picture 2" descr="fig7_error.png"/>
+          <p:cNvPicPr>
+            <a:picLocks noChangeAspect="1"/>
+          </p:cNvPicPr>
+          <p:nvPr/>
+        </p:nvPicPr>
+        <p:blipFill>
+          <a:blip r:embed="rId2"/>
+          <a:stretch>
+            <a:fillRect/>
+          </a:stretch>
+        </p:blipFill>
+        <p:spPr>
+          <a:xfrm>
+            <a:off x="425196" y="914400"/>
+            <a:ext cx="11338560" cy="3732541"/>
+          </a:xfrm>
+          <a:prstGeom prst="rect">
+            <a:avLst/>
+          </a:prstGeom>
+        </p:spPr>
+      </p:pic>
+      <p:sp>
+        <p:nvSpPr>
+          <p:cNvPr id="4" name="TextBox 3"/>
+          <p:cNvSpPr txBox="1"/>
+          <p:nvPr/>
+        </p:nvSpPr>
+        <p:spPr>
+          <a:xfrm>
+            <a:off x="548640" y="6080760"/>
+            <a:ext cx="11064240" cy="640080"/>
+          </a:xfrm>
+          <a:prstGeom prst="rect">
+            <a:avLst/>
+          </a:prstGeom>
+          <a:noFill/>
+        </p:spPr>
+        <p:txBody>
+          <a:bodyPr wrap="square">
+            <a:spAutoFit/>
+          </a:bodyPr>
+          <a:lstStyle/>
+          <a:p>
+            <a:pPr algn="ctr">
+              <a:defRPr sz="1500" b="1">
+                <a:solidFill>
+                  <a:srgbClr val="D96B27"/>
+                </a:solidFill>
+              </a:defRPr>
+            </a:pPr>
+            <a:r>
+              <a:t>A difference in one read = error (ignored); the same difference in many reads = a real variant. Edges need a quorum (k≥3).</a:t>
+            </a:r>
+          </a:p>
+        </p:txBody>
+      </p:sp>
+    </p:spTree>
+  </p:cSld>
+  <p:clrMapOvr>
+    <a:masterClrMapping/>
+  </p:clrMapOvr>
+</p:sld>
+</file>
+
+<file path=ppt/slides/slide12.xml><?xml version="1.0" encoding="utf-8"?>
+<p:sld xmlns:a="http://schemas.openxmlformats.org/drawingml/2006/main" xmlns:p="http://schemas.openxmlformats.org/presentationml/2006/main" xmlns:r="http://schemas.openxmlformats.org/officeDocument/2006/relationships">
+  <p:cSld>
+    <p:spTree>
+      <p:nvGrpSpPr>
+        <p:cNvPr id="1" name=""/>
+        <p:cNvGrpSpPr/>
+        <p:nvPr/>
+      </p:nvGrpSpPr>
+      <p:grpSpPr/>
+      <p:sp>
+        <p:nvSpPr>
+          <p:cNvPr id="2" name="TextBox 1"/>
+          <p:cNvSpPr txBox="1"/>
+          <p:nvPr/>
+        </p:nvSpPr>
+        <p:spPr>
+          <a:xfrm>
+            <a:off x="457200" y="164592"/>
+            <a:ext cx="11247120" cy="640080"/>
+          </a:xfrm>
+          <a:prstGeom prst="rect">
+            <a:avLst/>
+          </a:prstGeom>
+          <a:noFill/>
+        </p:spPr>
+        <p:txBody>
+          <a:bodyPr wrap="none">
+            <a:spAutoFit/>
+          </a:bodyPr>
+          <a:lstStyle/>
+          <a:p>
+            <a:pPr>
+              <a:defRPr sz="2400" b="1">
+                <a:solidFill>
+                  <a:srgbClr val="1F2D5A"/>
+                </a:solidFill>
+              </a:defRPr>
+            </a:pPr>
+            <a:r>
+              <a:t>Digesting a read into exons (CIGAR → exons → union)</a:t>
+            </a:r>
+          </a:p>
+        </p:txBody>
+      </p:sp>
+      <p:pic>
+        <p:nvPicPr>
+          <p:cNvPr id="3" name="Picture 2" descr="fig8_cigar.png"/>
+          <p:cNvPicPr>
+            <a:picLocks noChangeAspect="1"/>
+          </p:cNvPicPr>
+          <p:nvPr/>
+        </p:nvPicPr>
+        <p:blipFill>
+          <a:blip r:embed="rId2"/>
+          <a:stretch>
+            <a:fillRect/>
+          </a:stretch>
+        </p:blipFill>
+        <p:spPr>
+          <a:xfrm>
+            <a:off x="425196" y="914400"/>
+            <a:ext cx="11338560" cy="4320729"/>
+          </a:xfrm>
+          <a:prstGeom prst="rect">
+            <a:avLst/>
+          </a:prstGeom>
+        </p:spPr>
+      </p:pic>
+      <p:sp>
+        <p:nvSpPr>
+          <p:cNvPr id="4" name="TextBox 3"/>
+          <p:cNvSpPr txBox="1"/>
+          <p:nvPr/>
+        </p:nvSpPr>
+        <p:spPr>
+          <a:xfrm>
+            <a:off x="548640" y="6080760"/>
+            <a:ext cx="11064240" cy="640080"/>
+          </a:xfrm>
+          <a:prstGeom prst="rect">
+            <a:avLst/>
+          </a:prstGeom>
+          <a:noFill/>
+        </p:spPr>
+        <p:txBody>
+          <a:bodyPr wrap="square">
+            <a:spAutoFit/>
+          </a:bodyPr>
+          <a:lstStyle/>
+          <a:p>
+            <a:pPr algn="ctr">
+              <a:defRPr sz="1500" b="1">
+                <a:solidFill>
+                  <a:srgbClr val="D96B27"/>
+                </a:solidFill>
+              </a:defRPr>
+            </a:pPr>
+            <a:r>
+              <a:t>Each read's CIGAR marks exons (M) and introns (N); junctions are trusted by recurrence + canonical GT–AG; exons are then unioned.</a:t>
+            </a:r>
+          </a:p>
+        </p:txBody>
+      </p:sp>
+    </p:spTree>
+  </p:cSld>
+  <p:clrMapOvr>
+    <a:masterClrMapping/>
+  </p:clrMapOvr>
+</p:sld>
+</file>
+
 <file path=ppt/slides/slide2.xml><?xml version="1.0" encoding="utf-8"?>
 <p:sld xmlns:a="http://schemas.openxmlformats.org/drawingml/2006/main" xmlns:p="http://schemas.openxmlformats.org/presentationml/2006/main" xmlns:r="http://schemas.openxmlformats.org/officeDocument/2006/relationships">
   <p:cSld>
@@ -3537,7 +3878,7 @@
               </a:defRPr>
             </a:pPr>
             <a:r>
-              <a:t>How we align the copies: a dot-plot  →  backbone or not (~B)</a:t>
+              <a:t>Aligning the copies: a dot-plot  →  backbone or not (~B)</a:t>
             </a:r>
           </a:p>
         </p:txBody>
@@ -3596,7 +3937,7 @@
               </a:defRPr>
             </a:pPr>
             <a:r>
-              <a:t>Align the copy models to each other; a diagonal = a shared backbone over most of both. Bridge: no diagonal → ~B fails.</a:t>
+              <a:t>A SECOND, separate minimap2 run aligns copy-vs-copy (not the read 'de' tag): diagonal = shared backbone (~B ✓); bridge = none (~B ✗).</a:t>
             </a:r>
           </a:p>
         </p:txBody>
@@ -3842,6 +4183,195 @@
             </a:pPr>
             <a:r>
               <a:t>Built only from reads:  align → loci → count ties → ~R graph → components → exon-union copies → align → ~B → family.</a:t>
+            </a:r>
+          </a:p>
+        </p:txBody>
+      </p:sp>
+    </p:spTree>
+  </p:cSld>
+  <p:clrMapOvr>
+    <a:masterClrMapping/>
+  </p:clrMapOvr>
+</p:sld>
+</file>
+
+<file path=ppt/slides/slide8.xml><?xml version="1.0" encoding="utf-8"?>
+<p:sld xmlns:a="http://schemas.openxmlformats.org/drawingml/2006/main" xmlns:p="http://schemas.openxmlformats.org/presentationml/2006/main" xmlns:r="http://schemas.openxmlformats.org/officeDocument/2006/relationships">
+  <p:cSld>
+    <p:spTree>
+      <p:nvGrpSpPr>
+        <p:cNvPr id="1" name=""/>
+        <p:cNvGrpSpPr/>
+        <p:nvPr/>
+      </p:nvGrpSpPr>
+      <p:grpSpPr/>
+      <p:sp>
+        <p:nvSpPr>
+          <p:cNvPr id="2" name="TextBox 1"/>
+          <p:cNvSpPr txBox="1"/>
+          <p:nvPr/>
+        </p:nvSpPr>
+        <p:spPr>
+          <a:xfrm>
+            <a:off x="457200" y="164592"/>
+            <a:ext cx="11247120" cy="640080"/>
+          </a:xfrm>
+          <a:prstGeom prst="rect">
+            <a:avLst/>
+          </a:prstGeom>
+          <a:noFill/>
+        </p:spPr>
+        <p:txBody>
+          <a:bodyPr wrap="none">
+            <a:spAutoFit/>
+          </a:bodyPr>
+          <a:lstStyle/>
+          <a:p>
+            <a:pPr>
+              <a:defRPr sz="2400" b="1">
+                <a:solidFill>
+                  <a:srgbClr val="1F2D5A"/>
+                </a:solidFill>
+              </a:defRPr>
+            </a:pPr>
+            <a:r>
+              <a:t>Results: gene families found  (precision / recall)</a:t>
+            </a:r>
+          </a:p>
+        </p:txBody>
+      </p:sp>
+      <p:pic>
+        <p:nvPicPr>
+          <p:cNvPr id="3" name="Picture 2" descr="fig9_results.png"/>
+          <p:cNvPicPr>
+            <a:picLocks noChangeAspect="1"/>
+          </p:cNvPicPr>
+          <p:nvPr/>
+        </p:nvPicPr>
+        <p:blipFill>
+          <a:blip r:embed="rId2"/>
+          <a:stretch>
+            <a:fillRect/>
+          </a:stretch>
+        </p:blipFill>
+        <p:spPr>
+          <a:xfrm>
+            <a:off x="2234656" y="914400"/>
+            <a:ext cx="7719639" cy="4892040"/>
+          </a:xfrm>
+          <a:prstGeom prst="rect">
+            <a:avLst/>
+          </a:prstGeom>
+        </p:spPr>
+      </p:pic>
+      <p:sp>
+        <p:nvSpPr>
+          <p:cNvPr id="4" name="TextBox 3"/>
+          <p:cNvSpPr txBox="1"/>
+          <p:nvPr/>
+        </p:nvSpPr>
+        <p:spPr>
+          <a:xfrm>
+            <a:off x="548640" y="6080760"/>
+            <a:ext cx="11064240" cy="640080"/>
+          </a:xfrm>
+          <a:prstGeom prst="rect">
+            <a:avLst/>
+          </a:prstGeom>
+          <a:noFill/>
+        </p:spPr>
+        <p:txBody>
+          <a:bodyPr wrap="square">
+            <a:spAutoFit/>
+          </a:bodyPr>
+          <a:lstStyle/>
+          <a:p>
+            <a:pPr algn="ctr">
+              <a:defRPr sz="1500" b="1">
+                <a:solidFill>
+                  <a:srgbClr val="D96B27"/>
+                </a:solidFill>
+              </a:defRPr>
+            </a:pPr>
+            <a:r>
+              <a:t>On the 17-candidate panel with hand-checked ground truth: precision = recall = 1.00 (0 false families, 0 missed).</a:t>
+            </a:r>
+          </a:p>
+        </p:txBody>
+      </p:sp>
+    </p:spTree>
+  </p:cSld>
+  <p:clrMapOvr>
+    <a:masterClrMapping/>
+  </p:clrMapOvr>
+</p:sld>
+</file>
+
+<file path=ppt/slides/slide9.xml><?xml version="1.0" encoding="utf-8"?>
+<p:sld xmlns:a="http://schemas.openxmlformats.org/drawingml/2006/main" xmlns:p="http://schemas.openxmlformats.org/presentationml/2006/main" xmlns:r="http://schemas.openxmlformats.org/officeDocument/2006/relationships">
+  <p:cSld>
+    <p:spTree>
+      <p:nvGrpSpPr>
+        <p:cNvPr id="1" name=""/>
+        <p:cNvGrpSpPr/>
+        <p:nvPr/>
+      </p:nvGrpSpPr>
+      <p:grpSpPr/>
+      <p:sp>
+        <p:nvSpPr>
+          <p:cNvPr id="2" name="TextBox 1"/>
+          <p:cNvSpPr txBox="1"/>
+          <p:nvPr/>
+        </p:nvSpPr>
+        <p:spPr>
+          <a:xfrm>
+            <a:off x="731520" y="2286000"/>
+            <a:ext cx="10698480" cy="2286000"/>
+          </a:xfrm>
+          <a:prstGeom prst="rect">
+            <a:avLst/>
+          </a:prstGeom>
+          <a:noFill/>
+        </p:spPr>
+        <p:txBody>
+          <a:bodyPr wrap="square">
+            <a:spAutoFit/>
+          </a:bodyPr>
+          <a:lstStyle/>
+          <a:p>
+            <a:pPr>
+              <a:defRPr sz="3400" b="1">
+                <a:solidFill>
+                  <a:srgbClr val="1F2D5A"/>
+                </a:solidFill>
+              </a:defRPr>
+            </a:pPr>
+            <a:r>
+              <a:t>Appendix — how it actually works</a:t>
+            </a:r>
+          </a:p>
+          <a:p>
+            <a:pPr>
+              <a:defRPr sz="1700">
+                <a:solidFill>
+                  <a:srgbClr val="555555"/>
+                </a:solidFill>
+              </a:defRPr>
+            </a:pPr>
+            <a:r>
+              <a:t>the alignment algorithm &amp; scoring · error vs. real difference · digesting a read into exons</a:t>
+            </a:r>
+          </a:p>
+          <a:p>
+            <a:pPr>
+              <a:defRPr sz="1300" b="1">
+                <a:solidFill>
+                  <a:srgbClr val="D96B27"/>
+                </a:solidFill>
+              </a:defRPr>
+            </a:pPr>
+            <a:r>
+              <a:t>What is minimap2's vs ours:  minimap2 does the ALIGNMENT (reads → placements, de, CIGAR — we do not implement an aligner). Our method is everything downstream — the two relations, the graph, the definition.</a:t>
             </a:r>
           </a:p>
         </p:txBody>

--- a/bench/family_definition_visual.pptx
+++ b/bench/family_definition_visual.pptx
@@ -3206,14 +3206,14 @@
               </a:defRPr>
             </a:pPr>
             <a:r>
-              <a:t>How the alignment works (minimap2's job, not ours; not Needleman–Wunsch)</a:t>
+              <a:t>What do we align — and how do we know what to align to?</a:t>
             </a:r>
           </a:p>
         </p:txBody>
       </p:sp>
       <p:pic>
         <p:nvPicPr>
-          <p:cNvPr id="3" name="Picture 2" descr="fig6_algo.png"/>
+          <p:cNvPr id="3" name="Picture 2" descr="fig_pair.png"/>
           <p:cNvPicPr>
             <a:picLocks noChangeAspect="1"/>
           </p:cNvPicPr>
@@ -3227,8 +3227,8 @@
         </p:blipFill>
         <p:spPr>
           <a:xfrm>
-            <a:off x="425196" y="914400"/>
-            <a:ext cx="11338560" cy="4046663"/>
+            <a:off x="622072" y="914400"/>
+            <a:ext cx="10944807" cy="4892040"/>
           </a:xfrm>
           <a:prstGeom prst="rect">
             <a:avLst/>
@@ -3265,7 +3265,7 @@
               </a:defRPr>
             </a:pPr>
             <a:r>
-              <a:t>minimap2 — not us — does seed–chain–align (minimizer seeds → chaining → banded affine-gap DP). We only consume its output.</a:t>
+              <a:t>The reads pre-select: a multimapping read says which loci might be copies (~R); we align only those, copy-vs-copy (minimap2 asm20) → ~B.</a:t>
             </a:r>
           </a:p>
         </p:txBody>
@@ -4256,8 +4256,8 @@
         </p:blipFill>
         <p:spPr>
           <a:xfrm>
-            <a:off x="2234656" y="914400"/>
-            <a:ext cx="7719639" cy="4892040"/>
+            <a:off x="1801711" y="914400"/>
+            <a:ext cx="8585530" cy="4892040"/>
           </a:xfrm>
           <a:prstGeom prst="rect">
             <a:avLst/>
@@ -4359,7 +4359,7 @@
               </a:defRPr>
             </a:pPr>
             <a:r>
-              <a:t>the alignment algorithm &amp; scoring · error vs. real difference · digesting a read into exons</a:t>
+              <a:t>what we align &amp; how we know what to align to · error vs. real difference · digesting a read into exons</a:t>
             </a:r>
           </a:p>
           <a:p>
@@ -4371,7 +4371,7 @@
               </a:defRPr>
             </a:pPr>
             <a:r>
-              <a:t>What is minimap2's vs ours:  minimap2 does the ALIGNMENT (reads → placements, de, CIGAR — we do not implement an aligner). Our method is everything downstream — the two relations, the graph, the definition.</a:t>
+              <a:t>minimap2 does the ALIGNMENT (reads → placements, de, CIGAR — we do not implement an aligner). Our method is everything downstream — choosing WHAT to align, the two relations, the graph, the definition.</a:t>
             </a:r>
           </a:p>
         </p:txBody>

--- a/bench/family_definition_visual.pptx
+++ b/bench/family_definition_visual.pptx
@@ -5,20 +5,25 @@
     <p:sldMasterId id="2147483648" r:id="rId1"/>
   </p:sldMasterIdLst>
   <p:sldIdLst>
-    <p:sldId id="256" r:id="rId7"/>
-    <p:sldId id="257" r:id="rId8"/>
-    <p:sldId id="258" r:id="rId9"/>
-    <p:sldId id="259" r:id="rId10"/>
-    <p:sldId id="260" r:id="rId11"/>
-    <p:sldId id="261" r:id="rId12"/>
-    <p:sldId id="262" r:id="rId13"/>
-    <p:sldId id="263" r:id="rId14"/>
-    <p:sldId id="264" r:id="rId15"/>
-    <p:sldId id="265" r:id="rId16"/>
-    <p:sldId id="266" r:id="rId17"/>
-    <p:sldId id="267" r:id="rId18"/>
+    <p:sldId id="256" r:id="rId2"/>
+    <p:sldId id="257" r:id="rId3"/>
+    <p:sldId id="258" r:id="rId4"/>
+    <p:sldId id="259" r:id="rId5"/>
+    <p:sldId id="260" r:id="rId6"/>
+    <p:sldId id="261" r:id="rId7"/>
+    <p:sldId id="262" r:id="rId8"/>
+    <p:sldId id="263" r:id="rId9"/>
+    <p:sldId id="264" r:id="rId10"/>
+    <p:sldId id="265" r:id="rId11"/>
+    <p:sldId id="266" r:id="rId12"/>
+    <p:sldId id="267" r:id="rId13"/>
+    <p:sldId id="268" r:id="rId14"/>
+    <p:sldId id="269" r:id="rId15"/>
+    <p:sldId id="270" r:id="rId16"/>
+    <p:sldId id="271" r:id="rId17"/>
+    <p:sldId id="272" r:id="rId18"/>
   </p:sldIdLst>
-  <p:sldSz cx="12188952" cy="6858000" type="screen4x3"/>
+  <p:sldSz cx="12188825" cy="6858000"/>
   <p:notesSz cx="6858000" cy="9144000"/>
   <p:defaultTextStyle>
     <a:defPPr>
@@ -115,6 +120,22 @@
       </a:defRPr>
     </a:lvl9pPr>
   </p:defaultTextStyle>
+  <p:extLst>
+    <p:ext uri="{EFAFB233-063F-42B5-8137-9DF3F51BA10A}">
+      <p15:sldGuideLst xmlns:p15="http://schemas.microsoft.com/office/powerpoint/2012/main">
+        <p15:guide id="1" orient="horz" pos="2160">
+          <p15:clr>
+            <a:srgbClr val="A4A3A4"/>
+          </p15:clr>
+        </p15:guide>
+        <p15:guide id="2" pos="2880">
+          <p15:clr>
+            <a:srgbClr val="A4A3A4"/>
+          </p15:clr>
+        </p15:guide>
+      </p15:sldGuideLst>
+    </p:ext>
+  </p:extLst>
 </p:presentation>
 </file>
 
@@ -156,10 +177,9 @@
           <a:lstStyle/>
           <a:p>
             <a:r>
-              <a:rPr lang="en-US" smtClean="0"/>
+              <a:rPr lang="en-US"/>
               <a:t>Click to edit Master title style</a:t>
             </a:r>
-            <a:endParaRPr lang="en-US"/>
           </a:p>
         </p:txBody>
       </p:sp>
@@ -275,10 +295,9 @@
           </a:lstStyle>
           <a:p>
             <a:r>
-              <a:rPr lang="en-US" smtClean="0"/>
+              <a:rPr lang="en-US"/>
               <a:t>Click to edit Master subtitle style</a:t>
             </a:r>
-            <a:endParaRPr lang="en-US"/>
           </a:p>
         </p:txBody>
       </p:sp>
@@ -299,7 +318,7 @@
           <a:p>
             <a:fld id="{5BCAD085-E8A6-8845-BD4E-CB4CCA059FC4}" type="datetimeFigureOut">
               <a:rPr lang="en-US" smtClean="0"/>
-              <a:t>1/27/13</a:t>
+              <a:t>6/23/2026</a:t>
             </a:fld>
             <a:endParaRPr lang="en-US"/>
           </a:p>
@@ -393,10 +412,9 @@
           <a:lstStyle/>
           <a:p>
             <a:r>
-              <a:rPr lang="en-US" smtClean="0"/>
+              <a:rPr lang="en-US"/>
               <a:t>Click to edit Master title style</a:t>
             </a:r>
-            <a:endParaRPr lang="en-US"/>
           </a:p>
         </p:txBody>
       </p:sp>
@@ -417,38 +435,37 @@
           <a:p>
             <a:pPr lvl="0"/>
             <a:r>
-              <a:rPr lang="en-US" smtClean="0"/>
+              <a:rPr lang="en-US"/>
               <a:t>Click to edit Master text styles</a:t>
             </a:r>
           </a:p>
           <a:p>
             <a:pPr lvl="1"/>
             <a:r>
-              <a:rPr lang="en-US" smtClean="0"/>
+              <a:rPr lang="en-US"/>
               <a:t>Second level</a:t>
             </a:r>
           </a:p>
           <a:p>
             <a:pPr lvl="2"/>
             <a:r>
-              <a:rPr lang="en-US" smtClean="0"/>
+              <a:rPr lang="en-US"/>
               <a:t>Third level</a:t>
             </a:r>
           </a:p>
           <a:p>
             <a:pPr lvl="3"/>
             <a:r>
-              <a:rPr lang="en-US" smtClean="0"/>
+              <a:rPr lang="en-US"/>
               <a:t>Fourth level</a:t>
             </a:r>
           </a:p>
           <a:p>
             <a:pPr lvl="4"/>
             <a:r>
-              <a:rPr lang="en-US" smtClean="0"/>
+              <a:rPr lang="en-US"/>
               <a:t>Fifth level</a:t>
             </a:r>
-            <a:endParaRPr lang="en-US"/>
           </a:p>
         </p:txBody>
       </p:sp>
@@ -469,7 +486,7 @@
           <a:p>
             <a:fld id="{5BCAD085-E8A6-8845-BD4E-CB4CCA059FC4}" type="datetimeFigureOut">
               <a:rPr lang="en-US" smtClean="0"/>
-              <a:t>1/27/13</a:t>
+              <a:t>6/23/2026</a:t>
             </a:fld>
             <a:endParaRPr lang="en-US"/>
           </a:p>
@@ -568,10 +585,9 @@
           <a:lstStyle/>
           <a:p>
             <a:r>
-              <a:rPr lang="en-US" smtClean="0"/>
+              <a:rPr lang="en-US"/>
               <a:t>Click to edit Master title style</a:t>
             </a:r>
-            <a:endParaRPr lang="en-US"/>
           </a:p>
         </p:txBody>
       </p:sp>
@@ -597,38 +613,37 @@
           <a:p>
             <a:pPr lvl="0"/>
             <a:r>
-              <a:rPr lang="en-US" smtClean="0"/>
+              <a:rPr lang="en-US"/>
               <a:t>Click to edit Master text styles</a:t>
             </a:r>
           </a:p>
           <a:p>
             <a:pPr lvl="1"/>
             <a:r>
-              <a:rPr lang="en-US" smtClean="0"/>
+              <a:rPr lang="en-US"/>
               <a:t>Second level</a:t>
             </a:r>
           </a:p>
           <a:p>
             <a:pPr lvl="2"/>
             <a:r>
-              <a:rPr lang="en-US" smtClean="0"/>
+              <a:rPr lang="en-US"/>
               <a:t>Third level</a:t>
             </a:r>
           </a:p>
           <a:p>
             <a:pPr lvl="3"/>
             <a:r>
-              <a:rPr lang="en-US" smtClean="0"/>
+              <a:rPr lang="en-US"/>
               <a:t>Fourth level</a:t>
             </a:r>
           </a:p>
           <a:p>
             <a:pPr lvl="4"/>
             <a:r>
-              <a:rPr lang="en-US" smtClean="0"/>
+              <a:rPr lang="en-US"/>
               <a:t>Fifth level</a:t>
             </a:r>
-            <a:endParaRPr lang="en-US"/>
           </a:p>
         </p:txBody>
       </p:sp>
@@ -649,7 +664,7 @@
           <a:p>
             <a:fld id="{5BCAD085-E8A6-8845-BD4E-CB4CCA059FC4}" type="datetimeFigureOut">
               <a:rPr lang="en-US" smtClean="0"/>
-              <a:t>1/27/13</a:t>
+              <a:t>6/23/2026</a:t>
             </a:fld>
             <a:endParaRPr lang="en-US"/>
           </a:p>
@@ -743,10 +758,9 @@
           <a:lstStyle/>
           <a:p>
             <a:r>
-              <a:rPr lang="en-US" smtClean="0"/>
+              <a:rPr lang="en-US"/>
               <a:t>Click to edit Master title style</a:t>
             </a:r>
-            <a:endParaRPr lang="en-US"/>
           </a:p>
         </p:txBody>
       </p:sp>
@@ -767,38 +781,37 @@
           <a:p>
             <a:pPr lvl="0"/>
             <a:r>
-              <a:rPr lang="en-US" smtClean="0"/>
+              <a:rPr lang="en-US"/>
               <a:t>Click to edit Master text styles</a:t>
             </a:r>
           </a:p>
           <a:p>
             <a:pPr lvl="1"/>
             <a:r>
-              <a:rPr lang="en-US" smtClean="0"/>
+              <a:rPr lang="en-US"/>
               <a:t>Second level</a:t>
             </a:r>
           </a:p>
           <a:p>
             <a:pPr lvl="2"/>
             <a:r>
-              <a:rPr lang="en-US" smtClean="0"/>
+              <a:rPr lang="en-US"/>
               <a:t>Third level</a:t>
             </a:r>
           </a:p>
           <a:p>
             <a:pPr lvl="3"/>
             <a:r>
-              <a:rPr lang="en-US" smtClean="0"/>
+              <a:rPr lang="en-US"/>
               <a:t>Fourth level</a:t>
             </a:r>
           </a:p>
           <a:p>
             <a:pPr lvl="4"/>
             <a:r>
-              <a:rPr lang="en-US" smtClean="0"/>
+              <a:rPr lang="en-US"/>
               <a:t>Fifth level</a:t>
             </a:r>
-            <a:endParaRPr lang="en-US"/>
           </a:p>
         </p:txBody>
       </p:sp>
@@ -819,7 +832,7 @@
           <a:p>
             <a:fld id="{5BCAD085-E8A6-8845-BD4E-CB4CCA059FC4}" type="datetimeFigureOut">
               <a:rPr lang="en-US" smtClean="0"/>
-              <a:t>1/27/13</a:t>
+              <a:t>6/23/2026</a:t>
             </a:fld>
             <a:endParaRPr lang="en-US"/>
           </a:p>
@@ -922,10 +935,9 @@
           </a:lstStyle>
           <a:p>
             <a:r>
-              <a:rPr lang="en-US" smtClean="0"/>
+              <a:rPr lang="en-US"/>
               <a:t>Click to edit Master title style</a:t>
             </a:r>
-            <a:endParaRPr lang="en-US"/>
           </a:p>
         </p:txBody>
       </p:sp>
@@ -1042,7 +1054,7 @@
           <a:p>
             <a:pPr lvl="0"/>
             <a:r>
-              <a:rPr lang="en-US" smtClean="0"/>
+              <a:rPr lang="en-US"/>
               <a:t>Click to edit Master text styles</a:t>
             </a:r>
           </a:p>
@@ -1065,7 +1077,7 @@
           <a:p>
             <a:fld id="{5BCAD085-E8A6-8845-BD4E-CB4CCA059FC4}" type="datetimeFigureOut">
               <a:rPr lang="en-US" smtClean="0"/>
-              <a:t>1/27/13</a:t>
+              <a:t>6/23/2026</a:t>
             </a:fld>
             <a:endParaRPr lang="en-US"/>
           </a:p>
@@ -1159,10 +1171,9 @@
           <a:lstStyle/>
           <a:p>
             <a:r>
-              <a:rPr lang="en-US" smtClean="0"/>
+              <a:rPr lang="en-US"/>
               <a:t>Click to edit Master title style</a:t>
             </a:r>
-            <a:endParaRPr lang="en-US"/>
           </a:p>
         </p:txBody>
       </p:sp>
@@ -1216,38 +1227,37 @@
           <a:p>
             <a:pPr lvl="0"/>
             <a:r>
-              <a:rPr lang="en-US" smtClean="0"/>
+              <a:rPr lang="en-US"/>
               <a:t>Click to edit Master text styles</a:t>
             </a:r>
           </a:p>
           <a:p>
             <a:pPr lvl="1"/>
             <a:r>
-              <a:rPr lang="en-US" smtClean="0"/>
+              <a:rPr lang="en-US"/>
               <a:t>Second level</a:t>
             </a:r>
           </a:p>
           <a:p>
             <a:pPr lvl="2"/>
             <a:r>
-              <a:rPr lang="en-US" smtClean="0"/>
+              <a:rPr lang="en-US"/>
               <a:t>Third level</a:t>
             </a:r>
           </a:p>
           <a:p>
             <a:pPr lvl="3"/>
             <a:r>
-              <a:rPr lang="en-US" smtClean="0"/>
+              <a:rPr lang="en-US"/>
               <a:t>Fourth level</a:t>
             </a:r>
           </a:p>
           <a:p>
             <a:pPr lvl="4"/>
             <a:r>
-              <a:rPr lang="en-US" smtClean="0"/>
+              <a:rPr lang="en-US"/>
               <a:t>Fifth level</a:t>
             </a:r>
-            <a:endParaRPr lang="en-US"/>
           </a:p>
         </p:txBody>
       </p:sp>
@@ -1301,38 +1311,37 @@
           <a:p>
             <a:pPr lvl="0"/>
             <a:r>
-              <a:rPr lang="en-US" smtClean="0"/>
+              <a:rPr lang="en-US"/>
               <a:t>Click to edit Master text styles</a:t>
             </a:r>
           </a:p>
           <a:p>
             <a:pPr lvl="1"/>
             <a:r>
-              <a:rPr lang="en-US" smtClean="0"/>
+              <a:rPr lang="en-US"/>
               <a:t>Second level</a:t>
             </a:r>
           </a:p>
           <a:p>
             <a:pPr lvl="2"/>
             <a:r>
-              <a:rPr lang="en-US" smtClean="0"/>
+              <a:rPr lang="en-US"/>
               <a:t>Third level</a:t>
             </a:r>
           </a:p>
           <a:p>
             <a:pPr lvl="3"/>
             <a:r>
-              <a:rPr lang="en-US" smtClean="0"/>
+              <a:rPr lang="en-US"/>
               <a:t>Fourth level</a:t>
             </a:r>
           </a:p>
           <a:p>
             <a:pPr lvl="4"/>
             <a:r>
-              <a:rPr lang="en-US" smtClean="0"/>
+              <a:rPr lang="en-US"/>
               <a:t>Fifth level</a:t>
             </a:r>
-            <a:endParaRPr lang="en-US"/>
           </a:p>
         </p:txBody>
       </p:sp>
@@ -1353,7 +1362,7 @@
           <a:p>
             <a:fld id="{5BCAD085-E8A6-8845-BD4E-CB4CCA059FC4}" type="datetimeFigureOut">
               <a:rPr lang="en-US" smtClean="0"/>
-              <a:t>1/27/13</a:t>
+              <a:t>6/23/2026</a:t>
             </a:fld>
             <a:endParaRPr lang="en-US"/>
           </a:p>
@@ -1451,10 +1460,9 @@
           </a:lstStyle>
           <a:p>
             <a:r>
-              <a:rPr lang="en-US" smtClean="0"/>
+              <a:rPr lang="en-US"/>
               <a:t>Click to edit Master title style</a:t>
             </a:r>
-            <a:endParaRPr lang="en-US"/>
           </a:p>
         </p:txBody>
       </p:sp>
@@ -1517,7 +1525,7 @@
           <a:p>
             <a:pPr lvl="0"/>
             <a:r>
-              <a:rPr lang="en-US" smtClean="0"/>
+              <a:rPr lang="en-US"/>
               <a:t>Click to edit Master text styles</a:t>
             </a:r>
           </a:p>
@@ -1573,38 +1581,37 @@
           <a:p>
             <a:pPr lvl="0"/>
             <a:r>
-              <a:rPr lang="en-US" smtClean="0"/>
+              <a:rPr lang="en-US"/>
               <a:t>Click to edit Master text styles</a:t>
             </a:r>
           </a:p>
           <a:p>
             <a:pPr lvl="1"/>
             <a:r>
-              <a:rPr lang="en-US" smtClean="0"/>
+              <a:rPr lang="en-US"/>
               <a:t>Second level</a:t>
             </a:r>
           </a:p>
           <a:p>
             <a:pPr lvl="2"/>
             <a:r>
-              <a:rPr lang="en-US" smtClean="0"/>
+              <a:rPr lang="en-US"/>
               <a:t>Third level</a:t>
             </a:r>
           </a:p>
           <a:p>
             <a:pPr lvl="3"/>
             <a:r>
-              <a:rPr lang="en-US" smtClean="0"/>
+              <a:rPr lang="en-US"/>
               <a:t>Fourth level</a:t>
             </a:r>
           </a:p>
           <a:p>
             <a:pPr lvl="4"/>
             <a:r>
-              <a:rPr lang="en-US" smtClean="0"/>
+              <a:rPr lang="en-US"/>
               <a:t>Fifth level</a:t>
             </a:r>
-            <a:endParaRPr lang="en-US"/>
           </a:p>
         </p:txBody>
       </p:sp>
@@ -1667,7 +1674,7 @@
           <a:p>
             <a:pPr lvl="0"/>
             <a:r>
-              <a:rPr lang="en-US" smtClean="0"/>
+              <a:rPr lang="en-US"/>
               <a:t>Click to edit Master text styles</a:t>
             </a:r>
           </a:p>
@@ -1723,38 +1730,37 @@
           <a:p>
             <a:pPr lvl="0"/>
             <a:r>
-              <a:rPr lang="en-US" smtClean="0"/>
+              <a:rPr lang="en-US"/>
               <a:t>Click to edit Master text styles</a:t>
             </a:r>
           </a:p>
           <a:p>
             <a:pPr lvl="1"/>
             <a:r>
-              <a:rPr lang="en-US" smtClean="0"/>
+              <a:rPr lang="en-US"/>
               <a:t>Second level</a:t>
             </a:r>
           </a:p>
           <a:p>
             <a:pPr lvl="2"/>
             <a:r>
-              <a:rPr lang="en-US" smtClean="0"/>
+              <a:rPr lang="en-US"/>
               <a:t>Third level</a:t>
             </a:r>
           </a:p>
           <a:p>
             <a:pPr lvl="3"/>
             <a:r>
-              <a:rPr lang="en-US" smtClean="0"/>
+              <a:rPr lang="en-US"/>
               <a:t>Fourth level</a:t>
             </a:r>
           </a:p>
           <a:p>
             <a:pPr lvl="4"/>
             <a:r>
-              <a:rPr lang="en-US" smtClean="0"/>
+              <a:rPr lang="en-US"/>
               <a:t>Fifth level</a:t>
             </a:r>
-            <a:endParaRPr lang="en-US"/>
           </a:p>
         </p:txBody>
       </p:sp>
@@ -1775,7 +1781,7 @@
           <a:p>
             <a:fld id="{5BCAD085-E8A6-8845-BD4E-CB4CCA059FC4}" type="datetimeFigureOut">
               <a:rPr lang="en-US" smtClean="0"/>
-              <a:t>1/27/13</a:t>
+              <a:t>6/23/2026</a:t>
             </a:fld>
             <a:endParaRPr lang="en-US"/>
           </a:p>
@@ -1869,10 +1875,9 @@
           <a:lstStyle/>
           <a:p>
             <a:r>
-              <a:rPr lang="en-US" smtClean="0"/>
+              <a:rPr lang="en-US"/>
               <a:t>Click to edit Master title style</a:t>
             </a:r>
-            <a:endParaRPr lang="en-US"/>
           </a:p>
         </p:txBody>
       </p:sp>
@@ -1893,7 +1898,7 @@
           <a:p>
             <a:fld id="{5BCAD085-E8A6-8845-BD4E-CB4CCA059FC4}" type="datetimeFigureOut">
               <a:rPr lang="en-US" smtClean="0"/>
-              <a:t>1/27/13</a:t>
+              <a:t>6/23/2026</a:t>
             </a:fld>
             <a:endParaRPr lang="en-US"/>
           </a:p>
@@ -1988,7 +1993,7 @@
           <a:p>
             <a:fld id="{5BCAD085-E8A6-8845-BD4E-CB4CCA059FC4}" type="datetimeFigureOut">
               <a:rPr lang="en-US" smtClean="0"/>
-              <a:t>1/27/13</a:t>
+              <a:t>6/23/2026</a:t>
             </a:fld>
             <a:endParaRPr lang="en-US"/>
           </a:p>
@@ -2091,10 +2096,9 @@
           </a:lstStyle>
           <a:p>
             <a:r>
-              <a:rPr lang="en-US" smtClean="0"/>
+              <a:rPr lang="en-US"/>
               <a:t>Click to edit Master title style</a:t>
             </a:r>
-            <a:endParaRPr lang="en-US"/>
           </a:p>
         </p:txBody>
       </p:sp>
@@ -2148,38 +2152,37 @@
           <a:p>
             <a:pPr lvl="0"/>
             <a:r>
-              <a:rPr lang="en-US" smtClean="0"/>
+              <a:rPr lang="en-US"/>
               <a:t>Click to edit Master text styles</a:t>
             </a:r>
           </a:p>
           <a:p>
             <a:pPr lvl="1"/>
             <a:r>
-              <a:rPr lang="en-US" smtClean="0"/>
+              <a:rPr lang="en-US"/>
               <a:t>Second level</a:t>
             </a:r>
           </a:p>
           <a:p>
             <a:pPr lvl="2"/>
             <a:r>
-              <a:rPr lang="en-US" smtClean="0"/>
+              <a:rPr lang="en-US"/>
               <a:t>Third level</a:t>
             </a:r>
           </a:p>
           <a:p>
             <a:pPr lvl="3"/>
             <a:r>
-              <a:rPr lang="en-US" smtClean="0"/>
+              <a:rPr lang="en-US"/>
               <a:t>Fourth level</a:t>
             </a:r>
           </a:p>
           <a:p>
             <a:pPr lvl="4"/>
             <a:r>
-              <a:rPr lang="en-US" smtClean="0"/>
+              <a:rPr lang="en-US"/>
               <a:t>Fifth level</a:t>
             </a:r>
-            <a:endParaRPr lang="en-US"/>
           </a:p>
         </p:txBody>
       </p:sp>
@@ -2242,7 +2245,7 @@
           <a:p>
             <a:pPr lvl="0"/>
             <a:r>
-              <a:rPr lang="en-US" smtClean="0"/>
+              <a:rPr lang="en-US"/>
               <a:t>Click to edit Master text styles</a:t>
             </a:r>
           </a:p>
@@ -2265,7 +2268,7 @@
           <a:p>
             <a:fld id="{5BCAD085-E8A6-8845-BD4E-CB4CCA059FC4}" type="datetimeFigureOut">
               <a:rPr lang="en-US" smtClean="0"/>
-              <a:t>1/27/13</a:t>
+              <a:t>6/23/2026</a:t>
             </a:fld>
             <a:endParaRPr lang="en-US"/>
           </a:p>
@@ -2368,10 +2371,9 @@
           </a:lstStyle>
           <a:p>
             <a:r>
-              <a:rPr lang="en-US" smtClean="0"/>
+              <a:rPr lang="en-US"/>
               <a:t>Click to edit Master title style</a:t>
             </a:r>
-            <a:endParaRPr lang="en-US"/>
           </a:p>
         </p:txBody>
       </p:sp>
@@ -2495,7 +2497,7 @@
           <a:p>
             <a:pPr lvl="0"/>
             <a:r>
-              <a:rPr lang="en-US" smtClean="0"/>
+              <a:rPr lang="en-US"/>
               <a:t>Click to edit Master text styles</a:t>
             </a:r>
           </a:p>
@@ -2518,7 +2520,7 @@
           <a:p>
             <a:fld id="{5BCAD085-E8A6-8845-BD4E-CB4CCA059FC4}" type="datetimeFigureOut">
               <a:rPr lang="en-US" smtClean="0"/>
-              <a:t>1/27/13</a:t>
+              <a:t>6/23/2026</a:t>
             </a:fld>
             <a:endParaRPr lang="en-US"/>
           </a:p>
@@ -2627,10 +2629,9 @@
           <a:lstStyle/>
           <a:p>
             <a:r>
-              <a:rPr lang="en-US" smtClean="0"/>
+              <a:rPr lang="en-US"/>
               <a:t>Click to edit Master title style</a:t>
             </a:r>
-            <a:endParaRPr lang="en-US"/>
           </a:p>
         </p:txBody>
       </p:sp>
@@ -2661,38 +2662,37 @@
           <a:p>
             <a:pPr lvl="0"/>
             <a:r>
-              <a:rPr lang="en-US" smtClean="0"/>
+              <a:rPr lang="en-US"/>
               <a:t>Click to edit Master text styles</a:t>
             </a:r>
           </a:p>
           <a:p>
             <a:pPr lvl="1"/>
             <a:r>
-              <a:rPr lang="en-US" smtClean="0"/>
+              <a:rPr lang="en-US"/>
               <a:t>Second level</a:t>
             </a:r>
           </a:p>
           <a:p>
             <a:pPr lvl="2"/>
             <a:r>
-              <a:rPr lang="en-US" smtClean="0"/>
+              <a:rPr lang="en-US"/>
               <a:t>Third level</a:t>
             </a:r>
           </a:p>
           <a:p>
             <a:pPr lvl="3"/>
             <a:r>
-              <a:rPr lang="en-US" smtClean="0"/>
+              <a:rPr lang="en-US"/>
               <a:t>Fourth level</a:t>
             </a:r>
           </a:p>
           <a:p>
             <a:pPr lvl="4"/>
             <a:r>
-              <a:rPr lang="en-US" smtClean="0"/>
+              <a:rPr lang="en-US"/>
               <a:t>Fifth level</a:t>
             </a:r>
-            <a:endParaRPr lang="en-US"/>
           </a:p>
         </p:txBody>
       </p:sp>
@@ -2731,7 +2731,7 @@
           <a:p>
             <a:fld id="{5BCAD085-E8A6-8845-BD4E-CB4CCA059FC4}" type="datetimeFigureOut">
               <a:rPr lang="en-US" smtClean="0"/>
-              <a:t>1/27/13</a:t>
+              <a:t>6/23/2026</a:t>
             </a:fld>
             <a:endParaRPr lang="en-US"/>
           </a:p>
@@ -3090,7 +3090,7 @@
 </file>
 
 <file path=ppt/slides/slide1.xml><?xml version="1.0" encoding="utf-8"?>
-<p:sld xmlns:a="http://schemas.openxmlformats.org/drawingml/2006/main" xmlns:p="http://schemas.openxmlformats.org/presentationml/2006/main" xmlns:r="http://schemas.openxmlformats.org/officeDocument/2006/relationships">
+<p:sld xmlns:a="http://schemas.openxmlformats.org/drawingml/2006/main" xmlns:r="http://schemas.openxmlformats.org/officeDocument/2006/relationships" xmlns:p="http://schemas.openxmlformats.org/presentationml/2006/main">
   <p:cSld>
     <p:spTree>
       <p:nvGrpSpPr>
@@ -3098,7 +3098,14 @@
         <p:cNvGrpSpPr/>
         <p:nvPr/>
       </p:nvGrpSpPr>
-      <p:grpSpPr/>
+      <p:grpSpPr>
+        <a:xfrm>
+          <a:off x="0" y="0"/>
+          <a:ext cx="0" cy="0"/>
+          <a:chOff x="0" y="0"/>
+          <a:chExt cx="0" cy="0"/>
+        </a:xfrm>
+      </p:grpSpPr>
       <p:sp>
         <p:nvSpPr>
           <p:cNvPr id="2" name="TextBox 1"/>
@@ -3108,7 +3115,7 @@
         <p:spPr>
           <a:xfrm>
             <a:off x="640080" y="2194560"/>
-            <a:ext cx="10972800" cy="2377440"/>
+            <a:ext cx="10972800" cy="1477328"/>
           </a:xfrm>
           <a:prstGeom prst="rect">
             <a:avLst/>
@@ -3129,6 +3136,7 @@
               </a:defRPr>
             </a:pPr>
             <a:r>
+              <a:rPr dirty="0"/>
               <a:t>What is a multi-copy gene family?</a:t>
             </a:r>
           </a:p>
@@ -3141,19 +3149,34 @@
               </a:defRPr>
             </a:pPr>
             <a:r>
-              <a:t>Loci whose reads can't be told apart  (~R)   AND   whose copies share a backbone  (~B).</a:t>
+              <a:rPr dirty="0"/>
+              <a:t>Copies that share a whole-gene backbone  (~B)  —  a structural fact, expressed or not.</a:t>
             </a:r>
           </a:p>
           <a:p>
             <a:pPr>
               <a:defRPr sz="1600">
                 <a:solidFill>
+                  <a:srgbClr val="D96B27"/>
+                </a:solidFill>
+              </a:defRPr>
+            </a:pPr>
+            <a:r>
+              <a:rPr dirty="0"/>
+              <a:t>Today: defining the family (~B).   Next meeting: telling the copies apart (identifiability, PSVs).</a:t>
+            </a:r>
+          </a:p>
+          <a:p>
+            <a:pPr>
+              <a:defRPr sz="1400">
+                <a:solidFill>
                   <a:srgbClr val="555555"/>
                 </a:solidFill>
               </a:defRPr>
             </a:pPr>
             <a:r>
-              <a:t>Shown on one real family — the RFPL4A array, 5 tandem copies.</a:t>
+              <a:rPr dirty="0"/>
+              <a:t>Illustrated on one real family</a:t>
             </a:r>
           </a:p>
         </p:txBody>
@@ -3167,7 +3190,7 @@
 </file>
 
 <file path=ppt/slides/slide10.xml><?xml version="1.0" encoding="utf-8"?>
-<p:sld xmlns:a="http://schemas.openxmlformats.org/drawingml/2006/main" xmlns:p="http://schemas.openxmlformats.org/presentationml/2006/main" xmlns:r="http://schemas.openxmlformats.org/officeDocument/2006/relationships">
+<p:sld xmlns:a="http://schemas.openxmlformats.org/drawingml/2006/main" xmlns:r="http://schemas.openxmlformats.org/officeDocument/2006/relationships" xmlns:p="http://schemas.openxmlformats.org/presentationml/2006/main">
   <p:cSld>
     <p:spTree>
       <p:nvGrpSpPr>
@@ -3175,7 +3198,539 @@
         <p:cNvGrpSpPr/>
         <p:nvPr/>
       </p:nvGrpSpPr>
-      <p:grpSpPr/>
+      <p:grpSpPr>
+        <a:xfrm>
+          <a:off x="0" y="0"/>
+          <a:ext cx="0" cy="0"/>
+          <a:chOff x="0" y="0"/>
+          <a:chExt cx="0" cy="0"/>
+        </a:xfrm>
+      </p:grpSpPr>
+      <p:sp>
+        <p:nvSpPr>
+          <p:cNvPr id="2" name="TextBox 1"/>
+          <p:cNvSpPr txBox="1"/>
+          <p:nvPr/>
+        </p:nvSpPr>
+        <p:spPr>
+          <a:xfrm>
+            <a:off x="457200" y="164592"/>
+            <a:ext cx="11247120" cy="640080"/>
+          </a:xfrm>
+          <a:prstGeom prst="rect">
+            <a:avLst/>
+          </a:prstGeom>
+          <a:noFill/>
+        </p:spPr>
+        <p:txBody>
+          <a:bodyPr wrap="none">
+            <a:spAutoFit/>
+          </a:bodyPr>
+          <a:lstStyle/>
+          <a:p>
+            <a:pPr>
+              <a:defRPr sz="2400" b="1">
+                <a:solidFill>
+                  <a:srgbClr val="1F2D5A"/>
+                </a:solidFill>
+              </a:defRPr>
+            </a:pPr>
+            <a:r>
+              <a:t>Real families the definition covers</a:t>
+            </a:r>
+          </a:p>
+        </p:txBody>
+      </p:sp>
+      <p:pic>
+        <p:nvPicPr>
+          <p:cNvPr id="3" name="Picture 2" descr="fig_gallery.png"/>
+          <p:cNvPicPr>
+            <a:picLocks noChangeAspect="1"/>
+          </p:cNvPicPr>
+          <p:nvPr/>
+        </p:nvPicPr>
+        <p:blipFill>
+          <a:blip r:embed="rId2"/>
+          <a:stretch>
+            <a:fillRect/>
+          </a:stretch>
+        </p:blipFill>
+        <p:spPr>
+          <a:xfrm>
+            <a:off x="425196" y="914400"/>
+            <a:ext cx="11338560" cy="4792249"/>
+          </a:xfrm>
+          <a:prstGeom prst="rect">
+            <a:avLst/>
+          </a:prstGeom>
+        </p:spPr>
+      </p:pic>
+      <p:sp>
+        <p:nvSpPr>
+          <p:cNvPr id="4" name="TextBox 3"/>
+          <p:cNvSpPr txBox="1"/>
+          <p:nvPr/>
+        </p:nvSpPr>
+        <p:spPr>
+          <a:xfrm>
+            <a:off x="548640" y="6080760"/>
+            <a:ext cx="11064240" cy="640080"/>
+          </a:xfrm>
+          <a:prstGeom prst="rect">
+            <a:avLst/>
+          </a:prstGeom>
+          <a:noFill/>
+        </p:spPr>
+        <p:txBody>
+          <a:bodyPr wrap="square">
+            <a:spAutoFit/>
+          </a:bodyPr>
+          <a:lstStyle/>
+          <a:p>
+            <a:pPr algn="ctr">
+              <a:defRPr sz="1500" b="1">
+                <a:solidFill>
+                  <a:srgbClr val="D96B27"/>
+                </a:solidFill>
+              </a:defRPr>
+            </a:pPr>
+            <a:r>
+              <a:t>Validated named families — tandem arrays (RFPL4A, MAGEA), dispersed paralogs (RABL2, APOBEC3, AK6), immune loci — and the bridges it correctly excludes. Each a real paralog set.</a:t>
+            </a:r>
+          </a:p>
+        </p:txBody>
+      </p:sp>
+    </p:spTree>
+  </p:cSld>
+  <p:clrMapOvr>
+    <a:masterClrMapping/>
+  </p:clrMapOvr>
+</p:sld>
+</file>
+
+<file path=ppt/slides/slide11.xml><?xml version="1.0" encoding="utf-8"?>
+<p:sld xmlns:a="http://schemas.openxmlformats.org/drawingml/2006/main" xmlns:r="http://schemas.openxmlformats.org/officeDocument/2006/relationships" xmlns:p="http://schemas.openxmlformats.org/presentationml/2006/main">
+  <p:cSld>
+    <p:spTree>
+      <p:nvGrpSpPr>
+        <p:cNvPr id="1" name=""/>
+        <p:cNvGrpSpPr/>
+        <p:nvPr/>
+      </p:nvGrpSpPr>
+      <p:grpSpPr>
+        <a:xfrm>
+          <a:off x="0" y="0"/>
+          <a:ext cx="0" cy="0"/>
+          <a:chOff x="0" y="0"/>
+          <a:chExt cx="0" cy="0"/>
+        </a:xfrm>
+      </p:grpSpPr>
+      <p:sp>
+        <p:nvSpPr>
+          <p:cNvPr id="2" name="TextBox 1"/>
+          <p:cNvSpPr txBox="1"/>
+          <p:nvPr/>
+        </p:nvSpPr>
+        <p:spPr>
+          <a:xfrm>
+            <a:off x="731520" y="2286000"/>
+            <a:ext cx="10698480" cy="2286000"/>
+          </a:xfrm>
+          <a:prstGeom prst="rect">
+            <a:avLst/>
+          </a:prstGeom>
+          <a:noFill/>
+        </p:spPr>
+        <p:txBody>
+          <a:bodyPr wrap="square">
+            <a:spAutoFit/>
+          </a:bodyPr>
+          <a:lstStyle/>
+          <a:p>
+            <a:pPr>
+              <a:defRPr sz="3400" b="1">
+                <a:solidFill>
+                  <a:srgbClr val="D96B27"/>
+                </a:solidFill>
+              </a:defRPr>
+            </a:pPr>
+            <a:r>
+              <a:t>Next meeting — identifiability: resolving the copies</a:t>
+            </a:r>
+          </a:p>
+          <a:p>
+            <a:pPr>
+              <a:defRPr sz="1700">
+                <a:solidFill>
+                  <a:srgbClr val="555555"/>
+                </a:solidFill>
+              </a:defRPr>
+            </a:pPr>
+            <a:r>
+              <a:t>Today we DEFINED the families (~B). Next: within a family, which copies can reads actually tell apart — and how do we assign the ambiguous reads?</a:t>
+            </a:r>
+          </a:p>
+          <a:p>
+            <a:pPr>
+              <a:defRPr sz="1400" b="1">
+                <a:solidFill>
+                  <a:srgbClr val="1F2D5A"/>
+                </a:solidFill>
+              </a:defRPr>
+            </a:pPr>
+            <a:r>
+              <a:t>The tool: PSVs (copy-distinguishing variants) + copy-assignment. A preview of the read signal follows.</a:t>
+            </a:r>
+          </a:p>
+        </p:txBody>
+      </p:sp>
+    </p:spTree>
+  </p:cSld>
+  <p:clrMapOvr>
+    <a:masterClrMapping/>
+  </p:clrMapOvr>
+</p:sld>
+</file>
+
+<file path=ppt/slides/slide12.xml><?xml version="1.0" encoding="utf-8"?>
+<p:sld xmlns:a="http://schemas.openxmlformats.org/drawingml/2006/main" xmlns:r="http://schemas.openxmlformats.org/officeDocument/2006/relationships" xmlns:p="http://schemas.openxmlformats.org/presentationml/2006/main">
+  <p:cSld>
+    <p:spTree>
+      <p:nvGrpSpPr>
+        <p:cNvPr id="1" name=""/>
+        <p:cNvGrpSpPr/>
+        <p:nvPr/>
+      </p:nvGrpSpPr>
+      <p:grpSpPr>
+        <a:xfrm>
+          <a:off x="0" y="0"/>
+          <a:ext cx="0" cy="0"/>
+          <a:chOff x="0" y="0"/>
+          <a:chExt cx="0" cy="0"/>
+        </a:xfrm>
+      </p:grpSpPr>
+      <p:sp>
+        <p:nvSpPr>
+          <p:cNvPr id="2" name="TextBox 1"/>
+          <p:cNvSpPr txBox="1"/>
+          <p:nvPr/>
+        </p:nvSpPr>
+        <p:spPr>
+          <a:xfrm>
+            <a:off x="457200" y="164592"/>
+            <a:ext cx="11247120" cy="640080"/>
+          </a:xfrm>
+          <a:prstGeom prst="rect">
+            <a:avLst/>
+          </a:prstGeom>
+          <a:noFill/>
+        </p:spPr>
+        <p:txBody>
+          <a:bodyPr wrap="none">
+            <a:spAutoFit/>
+          </a:bodyPr>
+          <a:lstStyle/>
+          <a:p>
+            <a:pPr>
+              <a:defRPr sz="2400" b="1">
+                <a:solidFill>
+                  <a:srgbClr val="1F2D5A"/>
+                </a:solidFill>
+              </a:defRPr>
+            </a:pPr>
+            <a:r>
+              <a:t>Preview: reads that can't tell the copies apart  (~R)</a:t>
+            </a:r>
+          </a:p>
+        </p:txBody>
+      </p:sp>
+      <p:pic>
+        <p:nvPicPr>
+          <p:cNvPr id="3" name="Picture 2" descr="fig1_reads.png"/>
+          <p:cNvPicPr>
+            <a:picLocks noChangeAspect="1"/>
+          </p:cNvPicPr>
+          <p:nvPr/>
+        </p:nvPicPr>
+        <p:blipFill>
+          <a:blip r:embed="rId2"/>
+          <a:stretch>
+            <a:fillRect/>
+          </a:stretch>
+        </p:blipFill>
+        <p:spPr>
+          <a:xfrm>
+            <a:off x="425196" y="914400"/>
+            <a:ext cx="11338560" cy="3949451"/>
+          </a:xfrm>
+          <a:prstGeom prst="rect">
+            <a:avLst/>
+          </a:prstGeom>
+        </p:spPr>
+      </p:pic>
+      <p:sp>
+        <p:nvSpPr>
+          <p:cNvPr id="4" name="TextBox 3"/>
+          <p:cNvSpPr txBox="1"/>
+          <p:nvPr/>
+        </p:nvSpPr>
+        <p:spPr>
+          <a:xfrm>
+            <a:off x="548640" y="6080760"/>
+            <a:ext cx="11064240" cy="640080"/>
+          </a:xfrm>
+          <a:prstGeom prst="rect">
+            <a:avLst/>
+          </a:prstGeom>
+          <a:noFill/>
+        </p:spPr>
+        <p:txBody>
+          <a:bodyPr wrap="square">
+            <a:spAutoFit/>
+          </a:bodyPr>
+          <a:lstStyle/>
+          <a:p>
+            <a:pPr algn="ctr">
+              <a:defRPr sz="1500" b="1">
+                <a:solidFill>
+                  <a:srgbClr val="D96B27"/>
+                </a:solidFill>
+              </a:defRPr>
+            </a:pPr>
+            <a:r>
+              <a:t>Within a family, some reads fit several copies equally well (orange) — these are the reads copy-assignment must resolve. ~R measures how confusable the copies are.  [next meeting]</a:t>
+            </a:r>
+          </a:p>
+        </p:txBody>
+      </p:sp>
+    </p:spTree>
+  </p:cSld>
+  <p:clrMapOvr>
+    <a:masterClrMapping/>
+  </p:clrMapOvr>
+</p:sld>
+</file>
+
+<file path=ppt/slides/slide13.xml><?xml version="1.0" encoding="utf-8"?>
+<p:sld xmlns:a="http://schemas.openxmlformats.org/drawingml/2006/main" xmlns:r="http://schemas.openxmlformats.org/officeDocument/2006/relationships" xmlns:p="http://schemas.openxmlformats.org/presentationml/2006/main">
+  <p:cSld>
+    <p:spTree>
+      <p:nvGrpSpPr>
+        <p:cNvPr id="1" name=""/>
+        <p:cNvGrpSpPr/>
+        <p:nvPr/>
+      </p:nvGrpSpPr>
+      <p:grpSpPr>
+        <a:xfrm>
+          <a:off x="0" y="0"/>
+          <a:ext cx="0" cy="0"/>
+          <a:chOff x="0" y="0"/>
+          <a:chExt cx="0" cy="0"/>
+        </a:xfrm>
+      </p:grpSpPr>
+      <p:sp>
+        <p:nvSpPr>
+          <p:cNvPr id="2" name="TextBox 1"/>
+          <p:cNvSpPr txBox="1"/>
+          <p:nvPr/>
+        </p:nvSpPr>
+        <p:spPr>
+          <a:xfrm>
+            <a:off x="457200" y="164592"/>
+            <a:ext cx="11247120" cy="640080"/>
+          </a:xfrm>
+          <a:prstGeom prst="rect">
+            <a:avLst/>
+          </a:prstGeom>
+          <a:noFill/>
+        </p:spPr>
+        <p:txBody>
+          <a:bodyPr wrap="none">
+            <a:spAutoFit/>
+          </a:bodyPr>
+          <a:lstStyle/>
+          <a:p>
+            <a:pPr>
+              <a:defRPr sz="2400" b="1">
+                <a:solidFill>
+                  <a:srgbClr val="1F2D5A"/>
+                </a:solidFill>
+              </a:defRPr>
+            </a:pPr>
+            <a:r>
+              <a:t>Preview: the read signal — 'de' and a 'tie'</a:t>
+            </a:r>
+          </a:p>
+        </p:txBody>
+      </p:sp>
+      <p:pic>
+        <p:nvPicPr>
+          <p:cNvPr id="3" name="Picture 2" descr="fig4_align.png"/>
+          <p:cNvPicPr>
+            <a:picLocks noChangeAspect="1"/>
+          </p:cNvPicPr>
+          <p:nvPr/>
+        </p:nvPicPr>
+        <p:blipFill>
+          <a:blip r:embed="rId2"/>
+          <a:stretch>
+            <a:fillRect/>
+          </a:stretch>
+        </p:blipFill>
+        <p:spPr>
+          <a:xfrm>
+            <a:off x="425196" y="914400"/>
+            <a:ext cx="11338560" cy="4023797"/>
+          </a:xfrm>
+          <a:prstGeom prst="rect">
+            <a:avLst/>
+          </a:prstGeom>
+        </p:spPr>
+      </p:pic>
+      <p:sp>
+        <p:nvSpPr>
+          <p:cNvPr id="4" name="TextBox 3"/>
+          <p:cNvSpPr txBox="1"/>
+          <p:nvPr/>
+        </p:nvSpPr>
+        <p:spPr>
+          <a:xfrm>
+            <a:off x="548640" y="6080760"/>
+            <a:ext cx="11064240" cy="640080"/>
+          </a:xfrm>
+          <a:prstGeom prst="rect">
+            <a:avLst/>
+          </a:prstGeom>
+          <a:noFill/>
+        </p:spPr>
+        <p:txBody>
+          <a:bodyPr wrap="square">
+            <a:spAutoFit/>
+          </a:bodyPr>
+          <a:lstStyle/>
+          <a:p>
+            <a:pPr algn="ctr">
+              <a:defRPr sz="1500" b="1">
+                <a:solidFill>
+                  <a:srgbClr val="D96B27"/>
+                </a:solidFill>
+              </a:defRPr>
+            </a:pPr>
+            <a:r>
+              <a:t>minimap2's de = differences per base; two copies within Δ of each other on a read = a tie = read-confusable. This identifiability signal is where PSVs come in.  [next meeting]</a:t>
+            </a:r>
+          </a:p>
+        </p:txBody>
+      </p:sp>
+    </p:spTree>
+  </p:cSld>
+  <p:clrMapOvr>
+    <a:masterClrMapping/>
+  </p:clrMapOvr>
+</p:sld>
+</file>
+
+<file path=ppt/slides/slide14.xml><?xml version="1.0" encoding="utf-8"?>
+<p:sld xmlns:a="http://schemas.openxmlformats.org/drawingml/2006/main" xmlns:r="http://schemas.openxmlformats.org/officeDocument/2006/relationships" xmlns:p="http://schemas.openxmlformats.org/presentationml/2006/main">
+  <p:cSld>
+    <p:spTree>
+      <p:nvGrpSpPr>
+        <p:cNvPr id="1" name=""/>
+        <p:cNvGrpSpPr/>
+        <p:nvPr/>
+      </p:nvGrpSpPr>
+      <p:grpSpPr>
+        <a:xfrm>
+          <a:off x="0" y="0"/>
+          <a:ext cx="0" cy="0"/>
+          <a:chOff x="0" y="0"/>
+          <a:chExt cx="0" cy="0"/>
+        </a:xfrm>
+      </p:grpSpPr>
+      <p:sp>
+        <p:nvSpPr>
+          <p:cNvPr id="2" name="TextBox 1"/>
+          <p:cNvSpPr txBox="1"/>
+          <p:nvPr/>
+        </p:nvSpPr>
+        <p:spPr>
+          <a:xfrm>
+            <a:off x="731520" y="2286000"/>
+            <a:ext cx="10698480" cy="2286000"/>
+          </a:xfrm>
+          <a:prstGeom prst="rect">
+            <a:avLst/>
+          </a:prstGeom>
+          <a:noFill/>
+        </p:spPr>
+        <p:txBody>
+          <a:bodyPr wrap="square">
+            <a:spAutoFit/>
+          </a:bodyPr>
+          <a:lstStyle/>
+          <a:p>
+            <a:pPr>
+              <a:defRPr sz="3400" b="1">
+                <a:solidFill>
+                  <a:srgbClr val="1F2D5A"/>
+                </a:solidFill>
+              </a:defRPr>
+            </a:pPr>
+            <a:r>
+              <a:t>Appendix — how it actually works</a:t>
+            </a:r>
+          </a:p>
+          <a:p>
+            <a:pPr>
+              <a:defRPr sz="1700">
+                <a:solidFill>
+                  <a:srgbClr val="555555"/>
+                </a:solidFill>
+              </a:defRPr>
+            </a:pPr>
+            <a:r>
+              <a:t>what we align &amp; how we know what to align to · error vs. real difference · digesting a read into exons</a:t>
+            </a:r>
+          </a:p>
+          <a:p>
+            <a:pPr>
+              <a:defRPr sz="1300" b="1">
+                <a:solidFill>
+                  <a:srgbClr val="D96B27"/>
+                </a:solidFill>
+              </a:defRPr>
+            </a:pPr>
+            <a:r>
+              <a:t>minimap2 does the ALIGNMENT (reads → placements, de, CIGAR — we do not implement an aligner). Our method is everything downstream — choosing WHAT to align, the two relations, the graph, the definition.</a:t>
+            </a:r>
+          </a:p>
+        </p:txBody>
+      </p:sp>
+    </p:spTree>
+  </p:cSld>
+  <p:clrMapOvr>
+    <a:masterClrMapping/>
+  </p:clrMapOvr>
+</p:sld>
+</file>
+
+<file path=ppt/slides/slide15.xml><?xml version="1.0" encoding="utf-8"?>
+<p:sld xmlns:a="http://schemas.openxmlformats.org/drawingml/2006/main" xmlns:r="http://schemas.openxmlformats.org/officeDocument/2006/relationships" xmlns:p="http://schemas.openxmlformats.org/presentationml/2006/main">
+  <p:cSld>
+    <p:spTree>
+      <p:nvGrpSpPr>
+        <p:cNvPr id="1" name=""/>
+        <p:cNvGrpSpPr/>
+        <p:nvPr/>
+      </p:nvGrpSpPr>
+      <p:grpSpPr>
+        <a:xfrm>
+          <a:off x="0" y="0"/>
+          <a:ext cx="0" cy="0"/>
+          <a:chOff x="0" y="0"/>
+          <a:chExt cx="0" cy="0"/>
+        </a:xfrm>
+      </p:grpSpPr>
       <p:sp>
         <p:nvSpPr>
           <p:cNvPr id="2" name="TextBox 1"/>
@@ -3278,8 +3833,8 @@
 </p:sld>
 </file>
 
-<file path=ppt/slides/slide11.xml><?xml version="1.0" encoding="utf-8"?>
-<p:sld xmlns:a="http://schemas.openxmlformats.org/drawingml/2006/main" xmlns:p="http://schemas.openxmlformats.org/presentationml/2006/main" xmlns:r="http://schemas.openxmlformats.org/officeDocument/2006/relationships">
+<file path=ppt/slides/slide16.xml><?xml version="1.0" encoding="utf-8"?>
+<p:sld xmlns:a="http://schemas.openxmlformats.org/drawingml/2006/main" xmlns:r="http://schemas.openxmlformats.org/officeDocument/2006/relationships" xmlns:p="http://schemas.openxmlformats.org/presentationml/2006/main">
   <p:cSld>
     <p:spTree>
       <p:nvGrpSpPr>
@@ -3287,7 +3842,14 @@
         <p:cNvGrpSpPr/>
         <p:nvPr/>
       </p:nvGrpSpPr>
-      <p:grpSpPr/>
+      <p:grpSpPr>
+        <a:xfrm>
+          <a:off x="0" y="0"/>
+          <a:ext cx="0" cy="0"/>
+          <a:chOff x="0" y="0"/>
+          <a:chExt cx="0" cy="0"/>
+        </a:xfrm>
+      </p:grpSpPr>
       <p:sp>
         <p:nvSpPr>
           <p:cNvPr id="2" name="TextBox 1"/>
@@ -3390,8 +3952,8 @@
 </p:sld>
 </file>
 
-<file path=ppt/slides/slide12.xml><?xml version="1.0" encoding="utf-8"?>
-<p:sld xmlns:a="http://schemas.openxmlformats.org/drawingml/2006/main" xmlns:p="http://schemas.openxmlformats.org/presentationml/2006/main" xmlns:r="http://schemas.openxmlformats.org/officeDocument/2006/relationships">
+<file path=ppt/slides/slide17.xml><?xml version="1.0" encoding="utf-8"?>
+<p:sld xmlns:a="http://schemas.openxmlformats.org/drawingml/2006/main" xmlns:r="http://schemas.openxmlformats.org/officeDocument/2006/relationships" xmlns:p="http://schemas.openxmlformats.org/presentationml/2006/main">
   <p:cSld>
     <p:spTree>
       <p:nvGrpSpPr>
@@ -3399,7 +3961,14 @@
         <p:cNvGrpSpPr/>
         <p:nvPr/>
       </p:nvGrpSpPr>
-      <p:grpSpPr/>
+      <p:grpSpPr>
+        <a:xfrm>
+          <a:off x="0" y="0"/>
+          <a:ext cx="0" cy="0"/>
+          <a:chOff x="0" y="0"/>
+          <a:chExt cx="0" cy="0"/>
+        </a:xfrm>
+      </p:grpSpPr>
       <p:sp>
         <p:nvSpPr>
           <p:cNvPr id="2" name="TextBox 1"/>
@@ -3503,7 +4072,7 @@
 </file>
 
 <file path=ppt/slides/slide2.xml><?xml version="1.0" encoding="utf-8"?>
-<p:sld xmlns:a="http://schemas.openxmlformats.org/drawingml/2006/main" xmlns:p="http://schemas.openxmlformats.org/presentationml/2006/main" xmlns:r="http://schemas.openxmlformats.org/officeDocument/2006/relationships">
+<p:sld xmlns:a="http://schemas.openxmlformats.org/drawingml/2006/main" xmlns:r="http://schemas.openxmlformats.org/officeDocument/2006/relationships" xmlns:p="http://schemas.openxmlformats.org/presentationml/2006/main">
   <p:cSld>
     <p:spTree>
       <p:nvGrpSpPr>
@@ -3511,7 +4080,14 @@
         <p:cNvGrpSpPr/>
         <p:nvPr/>
       </p:nvGrpSpPr>
-      <p:grpSpPr/>
+      <p:grpSpPr>
+        <a:xfrm>
+          <a:off x="0" y="0"/>
+          <a:ext cx="0" cy="0"/>
+          <a:chOff x="0" y="0"/>
+          <a:chExt cx="0" cy="0"/>
+        </a:xfrm>
+      </p:grpSpPr>
       <p:sp>
         <p:nvSpPr>
           <p:cNvPr id="2" name="TextBox 1"/>
@@ -3542,231 +4118,7 @@
               </a:defRPr>
             </a:pPr>
             <a:r>
-              <a:t>Reads can't tell the copies apart  →  the relation ~R</a:t>
-            </a:r>
-          </a:p>
-        </p:txBody>
-      </p:sp>
-      <p:pic>
-        <p:nvPicPr>
-          <p:cNvPr id="3" name="Picture 2" descr="fig1_reads.png"/>
-          <p:cNvPicPr>
-            <a:picLocks noChangeAspect="1"/>
-          </p:cNvPicPr>
-          <p:nvPr/>
-        </p:nvPicPr>
-        <p:blipFill>
-          <a:blip r:embed="rId2"/>
-          <a:stretch>
-            <a:fillRect/>
-          </a:stretch>
-        </p:blipFill>
-        <p:spPr>
-          <a:xfrm>
-            <a:off x="425196" y="914400"/>
-            <a:ext cx="11338560" cy="3949451"/>
-          </a:xfrm>
-          <a:prstGeom prst="rect">
-            <a:avLst/>
-          </a:prstGeom>
-        </p:spPr>
-      </p:pic>
-      <p:sp>
-        <p:nvSpPr>
-          <p:cNvPr id="4" name="TextBox 3"/>
-          <p:cNvSpPr txBox="1"/>
-          <p:nvPr/>
-        </p:nvSpPr>
-        <p:spPr>
-          <a:xfrm>
-            <a:off x="548640" y="6080760"/>
-            <a:ext cx="11064240" cy="640080"/>
-          </a:xfrm>
-          <a:prstGeom prst="rect">
-            <a:avLst/>
-          </a:prstGeom>
-          <a:noFill/>
-        </p:spPr>
-        <p:txBody>
-          <a:bodyPr wrap="square">
-            <a:spAutoFit/>
-          </a:bodyPr>
-          <a:lstStyle/>
-          <a:p>
-            <a:pPr algn="ctr">
-              <a:defRPr sz="1500" b="1">
-                <a:solidFill>
-                  <a:srgbClr val="D96B27"/>
-                </a:solidFill>
-              </a:defRPr>
-            </a:pPr>
-            <a:r>
-              <a:t>5 copies, all expressed; 32 reads fit several copies equally well (orange) — each such read links two copies.</a:t>
-            </a:r>
-          </a:p>
-        </p:txBody>
-      </p:sp>
-    </p:spTree>
-  </p:cSld>
-  <p:clrMapOvr>
-    <a:masterClrMapping/>
-  </p:clrMapOvr>
-</p:sld>
-</file>
-
-<file path=ppt/slides/slide3.xml><?xml version="1.0" encoding="utf-8"?>
-<p:sld xmlns:a="http://schemas.openxmlformats.org/drawingml/2006/main" xmlns:p="http://schemas.openxmlformats.org/presentationml/2006/main" xmlns:r="http://schemas.openxmlformats.org/officeDocument/2006/relationships">
-  <p:cSld>
-    <p:spTree>
-      <p:nvGrpSpPr>
-        <p:cNvPr id="1" name=""/>
-        <p:cNvGrpSpPr/>
-        <p:nvPr/>
-      </p:nvGrpSpPr>
-      <p:grpSpPr/>
-      <p:sp>
-        <p:nvSpPr>
-          <p:cNvPr id="2" name="TextBox 1"/>
-          <p:cNvSpPr txBox="1"/>
-          <p:nvPr/>
-        </p:nvSpPr>
-        <p:spPr>
-          <a:xfrm>
-            <a:off x="457200" y="164592"/>
-            <a:ext cx="11247120" cy="640080"/>
-          </a:xfrm>
-          <a:prstGeom prst="rect">
-            <a:avLst/>
-          </a:prstGeom>
-          <a:noFill/>
-        </p:spPr>
-        <p:txBody>
-          <a:bodyPr wrap="none">
-            <a:spAutoFit/>
-          </a:bodyPr>
-          <a:lstStyle/>
-          <a:p>
-            <a:pPr>
-              <a:defRPr sz="2400" b="1">
-                <a:solidFill>
-                  <a:srgbClr val="1F2D5A"/>
-                </a:solidFill>
-              </a:defRPr>
-            </a:pPr>
-            <a:r>
-              <a:t>How a read aligns: the number 'de', and what a 'tie' is</a:t>
-            </a:r>
-          </a:p>
-        </p:txBody>
-      </p:sp>
-      <p:pic>
-        <p:nvPicPr>
-          <p:cNvPr id="3" name="Picture 2" descr="fig4_align.png"/>
-          <p:cNvPicPr>
-            <a:picLocks noChangeAspect="1"/>
-          </p:cNvPicPr>
-          <p:nvPr/>
-        </p:nvPicPr>
-        <p:blipFill>
-          <a:blip r:embed="rId2"/>
-          <a:stretch>
-            <a:fillRect/>
-          </a:stretch>
-        </p:blipFill>
-        <p:spPr>
-          <a:xfrm>
-            <a:off x="425196" y="914400"/>
-            <a:ext cx="11338560" cy="4023797"/>
-          </a:xfrm>
-          <a:prstGeom prst="rect">
-            <a:avLst/>
-          </a:prstGeom>
-        </p:spPr>
-      </p:pic>
-      <p:sp>
-        <p:nvSpPr>
-          <p:cNvPr id="4" name="TextBox 3"/>
-          <p:cNvSpPr txBox="1"/>
-          <p:nvPr/>
-        </p:nvSpPr>
-        <p:spPr>
-          <a:xfrm>
-            <a:off x="548640" y="6080760"/>
-            <a:ext cx="11064240" cy="640080"/>
-          </a:xfrm>
-          <a:prstGeom prst="rect">
-            <a:avLst/>
-          </a:prstGeom>
-          <a:noFill/>
-        </p:spPr>
-        <p:txBody>
-          <a:bodyPr wrap="square">
-            <a:spAutoFit/>
-          </a:bodyPr>
-          <a:lstStyle/>
-          <a:p>
-            <a:pPr algn="ctr">
-              <a:defRPr sz="1500" b="1">
-                <a:solidFill>
-                  <a:srgbClr val="D96B27"/>
-                </a:solidFill>
-              </a:defRPr>
-            </a:pPr>
-            <a:r>
-              <a:t>minimap2 aligns the read to each copy; de = differences per base. Two copies within Δ of each other = a tie = one ~R vote.</a:t>
-            </a:r>
-          </a:p>
-        </p:txBody>
-      </p:sp>
-    </p:spTree>
-  </p:cSld>
-  <p:clrMapOvr>
-    <a:masterClrMapping/>
-  </p:clrMapOvr>
-</p:sld>
-</file>
-
-<file path=ppt/slides/slide4.xml><?xml version="1.0" encoding="utf-8"?>
-<p:sld xmlns:a="http://schemas.openxmlformats.org/drawingml/2006/main" xmlns:p="http://schemas.openxmlformats.org/presentationml/2006/main" xmlns:r="http://schemas.openxmlformats.org/officeDocument/2006/relationships">
-  <p:cSld>
-    <p:spTree>
-      <p:nvGrpSpPr>
-        <p:cNvPr id="1" name=""/>
-        <p:cNvGrpSpPr/>
-        <p:nvPr/>
-      </p:nvGrpSpPr>
-      <p:grpSpPr/>
-      <p:sp>
-        <p:nvSpPr>
-          <p:cNvPr id="2" name="TextBox 1"/>
-          <p:cNvSpPr txBox="1"/>
-          <p:nvPr/>
-        </p:nvSpPr>
-        <p:spPr>
-          <a:xfrm>
-            <a:off x="457200" y="164592"/>
-            <a:ext cx="11247120" cy="640080"/>
-          </a:xfrm>
-          <a:prstGeom prst="rect">
-            <a:avLst/>
-          </a:prstGeom>
-          <a:noFill/>
-        </p:spPr>
-        <p:txBody>
-          <a:bodyPr wrap="none">
-            <a:spAutoFit/>
-          </a:bodyPr>
-          <a:lstStyle/>
-          <a:p>
-            <a:pPr>
-              <a:defRPr sz="2400" b="1">
-                <a:solidFill>
-                  <a:srgbClr val="1F2D5A"/>
-                </a:solidFill>
-              </a:defRPr>
-            </a:pPr>
-            <a:r>
-              <a:t>Sum the exons of all isoforms  →  one copy model</a:t>
+              <a:t>From reads to a copy model: sum the exons of all isoforms</a:t>
             </a:r>
           </a:p>
         </p:txBody>
@@ -3825,7 +4177,7 @@
               </a:defRPr>
             </a:pPr>
             <a:r>
-              <a:t>A copy's many isoforms (grey) sum to one exon-union (orange) — so splicing can't masquerade as extra copies.</a:t>
+              <a:t>A copy's many isoforms (grey) sum to one exon-union (orange) = its copy model — so splicing can't masquerade as extra copies. This is what ~B aligns.</a:t>
             </a:r>
           </a:p>
         </p:txBody>
@@ -3838,8 +4190,8 @@
 </p:sld>
 </file>
 
-<file path=ppt/slides/slide5.xml><?xml version="1.0" encoding="utf-8"?>
-<p:sld xmlns:a="http://schemas.openxmlformats.org/drawingml/2006/main" xmlns:p="http://schemas.openxmlformats.org/presentationml/2006/main" xmlns:r="http://schemas.openxmlformats.org/officeDocument/2006/relationships">
+<file path=ppt/slides/slide3.xml><?xml version="1.0" encoding="utf-8"?>
+<p:sld xmlns:a="http://schemas.openxmlformats.org/drawingml/2006/main" xmlns:r="http://schemas.openxmlformats.org/officeDocument/2006/relationships" xmlns:p="http://schemas.openxmlformats.org/presentationml/2006/main">
   <p:cSld>
     <p:spTree>
       <p:nvGrpSpPr>
@@ -3847,7 +4199,14 @@
         <p:cNvGrpSpPr/>
         <p:nvPr/>
       </p:nvGrpSpPr>
-      <p:grpSpPr/>
+      <p:grpSpPr>
+        <a:xfrm>
+          <a:off x="0" y="0"/>
+          <a:ext cx="0" cy="0"/>
+          <a:chOff x="0" y="0"/>
+          <a:chExt cx="0" cy="0"/>
+        </a:xfrm>
+      </p:grpSpPr>
       <p:sp>
         <p:nvSpPr>
           <p:cNvPr id="2" name="TextBox 1"/>
@@ -3878,7 +4237,7 @@
               </a:defRPr>
             </a:pPr>
             <a:r>
-              <a:t>Aligning the copies: a dot-plot  →  backbone or not (~B)</a:t>
+              <a:t>The family test: align the copy models  →  shared backbone? (~B)</a:t>
             </a:r>
           </a:p>
         </p:txBody>
@@ -3937,7 +4296,7 @@
               </a:defRPr>
             </a:pPr>
             <a:r>
-              <a:t>A SECOND, separate minimap2 run aligns copy-vs-copy (not the read 'de' tag): diagonal = shared backbone (~B ✓); bridge = none (~B ✗).</a:t>
+              <a:t>Copy-vs-copy minimap2 (not the read 'de' tag): a diagonal over the whole of each = shared backbone (~B ✓, one family); a bridge with no diagonal = ~B ✗ (cut).</a:t>
             </a:r>
           </a:p>
         </p:txBody>
@@ -3950,8 +4309,8 @@
 </p:sld>
 </file>
 
-<file path=ppt/slides/slide6.xml><?xml version="1.0" encoding="utf-8"?>
-<p:sld xmlns:a="http://schemas.openxmlformats.org/drawingml/2006/main" xmlns:p="http://schemas.openxmlformats.org/presentationml/2006/main" xmlns:r="http://schemas.openxmlformats.org/officeDocument/2006/relationships">
+<file path=ppt/slides/slide4.xml><?xml version="1.0" encoding="utf-8"?>
+<p:sld xmlns:a="http://schemas.openxmlformats.org/drawingml/2006/main" xmlns:r="http://schemas.openxmlformats.org/officeDocument/2006/relationships" xmlns:p="http://schemas.openxmlformats.org/presentationml/2006/main">
   <p:cSld>
     <p:spTree>
       <p:nvGrpSpPr>
@@ -3959,7 +4318,14 @@
         <p:cNvGrpSpPr/>
         <p:nvPr/>
       </p:nvGrpSpPr>
-      <p:grpSpPr/>
+      <p:grpSpPr>
+        <a:xfrm>
+          <a:off x="0" y="0"/>
+          <a:ext cx="0" cy="0"/>
+          <a:chOff x="0" y="0"/>
+          <a:chExt cx="0" cy="0"/>
+        </a:xfrm>
+      </p:grpSpPr>
       <p:sp>
         <p:nvSpPr>
           <p:cNvPr id="2" name="TextBox 1"/>
@@ -3968,8 +4334,8 @@
         </p:nvSpPr>
         <p:spPr>
           <a:xfrm>
-            <a:off x="457200" y="164592"/>
-            <a:ext cx="11247120" cy="640080"/>
+            <a:off x="548640" y="365760"/>
+            <a:ext cx="11064240" cy="731520"/>
           </a:xfrm>
           <a:prstGeom prst="rect">
             <a:avLst/>
@@ -3983,52 +4349,28 @@
           <a:lstStyle/>
           <a:p>
             <a:pPr>
-              <a:defRPr sz="2400" b="1">
+              <a:defRPr sz="2600" b="1">
                 <a:solidFill>
                   <a:srgbClr val="1F2D5A"/>
                 </a:solidFill>
               </a:defRPr>
             </a:pPr>
             <a:r>
-              <a:t>Ties → edges → graph (~R), confirmed by the backbone (~B)  =  FAMILY</a:t>
-            </a:r>
-          </a:p>
-        </p:txBody>
-      </p:sp>
-      <p:pic>
-        <p:nvPicPr>
-          <p:cNvPr id="3" name="Picture 2" descr="fig3_graph.png"/>
-          <p:cNvPicPr>
-            <a:picLocks noChangeAspect="1"/>
-          </p:cNvPicPr>
-          <p:nvPr/>
-        </p:nvPicPr>
-        <p:blipFill>
-          <a:blip r:embed="rId2"/>
-          <a:stretch>
-            <a:fillRect/>
-          </a:stretch>
-        </p:blipFill>
-        <p:spPr>
-          <a:xfrm>
-            <a:off x="425196" y="914400"/>
-            <a:ext cx="11338560" cy="4658478"/>
-          </a:xfrm>
-          <a:prstGeom prst="rect">
-            <a:avLst/>
-          </a:prstGeom>
-        </p:spPr>
-      </p:pic>
-      <p:sp>
-        <p:nvSpPr>
-          <p:cNvPr id="4" name="TextBox 3"/>
+              <a:t>The definition</a:t>
+            </a:r>
+          </a:p>
+        </p:txBody>
+      </p:sp>
+      <p:sp>
+        <p:nvSpPr>
+          <p:cNvPr id="3" name="TextBox 2"/>
           <p:cNvSpPr txBox="1"/>
           <p:nvPr/>
         </p:nvSpPr>
         <p:spPr>
           <a:xfrm>
-            <a:off x="548640" y="6080760"/>
-            <a:ext cx="11064240" cy="640080"/>
+            <a:off x="731520" y="1645920"/>
+            <a:ext cx="10698480" cy="3657600"/>
           </a:xfrm>
           <a:prstGeom prst="rect">
             <a:avLst/>
@@ -4041,7 +4383,83 @@
           </a:bodyPr>
           <a:lstStyle/>
           <a:p>
-            <a:pPr algn="ctr">
+            <a:pPr>
+              <a:spcAft>
+                <a:spcPts val="900"/>
+              </a:spcAft>
+              <a:defRPr sz="2200" b="1">
+                <a:solidFill>
+                  <a:srgbClr val="1F2D5A"/>
+                </a:solidFill>
+              </a:defRPr>
+            </a:pPr>
+            <a:r>
+              <a:t>A multi-copy gene family = a set of gene loci whose copies</a:t>
+            </a:r>
+          </a:p>
+          <a:p>
+            <a:pPr>
+              <a:spcAft>
+                <a:spcPts val="900"/>
+              </a:spcAft>
+              <a:defRPr sz="2100" b="1">
+                <a:solidFill>
+                  <a:srgbClr val="127A6E"/>
+                </a:solidFill>
+              </a:defRPr>
+            </a:pPr>
+            <a:r>
+              <a:t>share a WHOLE-GENE backbone (~B: copy models align reciprocally).</a:t>
+            </a:r>
+          </a:p>
+          <a:p>
+            <a:pPr>
+              <a:spcAft>
+                <a:spcPts val="900"/>
+              </a:spcAft>
+              <a:defRPr sz="800">
+                <a:solidFill>
+                  <a:srgbClr val="555555"/>
+                </a:solidFill>
+              </a:defRPr>
+            </a:pPr>
+            <a:endParaRPr/>
+          </a:p>
+          <a:p>
+            <a:pPr>
+              <a:spcAft>
+                <a:spcPts val="900"/>
+              </a:spcAft>
+              <a:defRPr sz="1700">
+                <a:solidFill>
+                  <a:srgbClr val="1F2D5A"/>
+                </a:solidFill>
+              </a:defRPr>
+            </a:pPr>
+            <a:r>
+              <a:t>A structural property — it holds whether or not the family is expressed.</a:t>
+            </a:r>
+          </a:p>
+          <a:p>
+            <a:pPr>
+              <a:spcAft>
+                <a:spcPts val="900"/>
+              </a:spcAft>
+              <a:defRPr sz="1500">
+                <a:solidFill>
+                  <a:srgbClr val="555555"/>
+                </a:solidFill>
+              </a:defRPr>
+            </a:pPr>
+            <a:r>
+              <a:t>Expression (observed / silent) and identifiability (can we resolve the copies?) are LABELS, not gates.</a:t>
+            </a:r>
+          </a:p>
+          <a:p>
+            <a:pPr>
+              <a:spcAft>
+                <a:spcPts val="900"/>
+              </a:spcAft>
               <a:defRPr sz="1500" b="1">
                 <a:solidFill>
                   <a:srgbClr val="D96B27"/>
@@ -4049,7 +4467,7 @@
               </a:defRPr>
             </a:pPr>
             <a:r>
-              <a:t>Left: every pair ties AND shares a backbone → one 5-copy family.   Right: a bridge ties but shares no backbone → cut.</a:t>
+              <a:t>Identifiability — telling the copies apart — is the NEXT step (PSVs, copy-assignment).</a:t>
             </a:r>
           </a:p>
         </p:txBody>
@@ -4062,8 +4480,8 @@
 </p:sld>
 </file>
 
-<file path=ppt/slides/slide7.xml><?xml version="1.0" encoding="utf-8"?>
-<p:sld xmlns:a="http://schemas.openxmlformats.org/drawingml/2006/main" xmlns:p="http://schemas.openxmlformats.org/presentationml/2006/main" xmlns:r="http://schemas.openxmlformats.org/officeDocument/2006/relationships">
+<file path=ppt/slides/slide5.xml><?xml version="1.0" encoding="utf-8"?>
+<p:sld xmlns:a="http://schemas.openxmlformats.org/drawingml/2006/main" xmlns:r="http://schemas.openxmlformats.org/officeDocument/2006/relationships" xmlns:p="http://schemas.openxmlformats.org/presentationml/2006/main">
   <p:cSld>
     <p:spTree>
       <p:nvGrpSpPr>
@@ -4071,140 +4489,14 @@
         <p:cNvGrpSpPr/>
         <p:nvPr/>
       </p:nvGrpSpPr>
-      <p:grpSpPr/>
-      <p:sp>
-        <p:nvSpPr>
-          <p:cNvPr id="2" name="TextBox 1"/>
-          <p:cNvSpPr txBox="1"/>
-          <p:nvPr/>
-        </p:nvSpPr>
-        <p:spPr>
-          <a:xfrm>
-            <a:off x="548640" y="365760"/>
-            <a:ext cx="11064240" cy="731520"/>
-          </a:xfrm>
-          <a:prstGeom prst="rect">
-            <a:avLst/>
-          </a:prstGeom>
-          <a:noFill/>
-        </p:spPr>
-        <p:txBody>
-          <a:bodyPr wrap="none">
-            <a:spAutoFit/>
-          </a:bodyPr>
-          <a:lstStyle/>
-          <a:p>
-            <a:pPr>
-              <a:defRPr sz="2600" b="1">
-                <a:solidFill>
-                  <a:srgbClr val="1F2D5A"/>
-                </a:solidFill>
-              </a:defRPr>
-            </a:pPr>
-            <a:r>
-              <a:t>The definition</a:t>
-            </a:r>
-          </a:p>
-        </p:txBody>
-      </p:sp>
-      <p:sp>
-        <p:nvSpPr>
-          <p:cNvPr id="3" name="TextBox 2"/>
-          <p:cNvSpPr txBox="1"/>
-          <p:nvPr/>
-        </p:nvSpPr>
-        <p:spPr>
-          <a:xfrm>
-            <a:off x="731520" y="1645920"/>
-            <a:ext cx="10698480" cy="3657600"/>
-          </a:xfrm>
-          <a:prstGeom prst="rect">
-            <a:avLst/>
-          </a:prstGeom>
-          <a:noFill/>
-        </p:spPr>
-        <p:txBody>
-          <a:bodyPr wrap="square">
-            <a:spAutoFit/>
-          </a:bodyPr>
-          <a:lstStyle/>
-          <a:p>
-            <a:pPr>
-              <a:spcAft>
-                <a:spcPts val="1000"/>
-              </a:spcAft>
-              <a:defRPr sz="2200" b="1">
-                <a:solidFill>
-                  <a:srgbClr val="1F2D5A"/>
-                </a:solidFill>
-              </a:defRPr>
-            </a:pPr>
-            <a:r>
-              <a:t>A multi-copy gene family = a set of de-novo loci that is</a:t>
-            </a:r>
-          </a:p>
-          <a:p>
-            <a:pPr>
-              <a:spcAft>
-                <a:spcPts val="1000"/>
-              </a:spcAft>
-              <a:defRPr sz="2000" b="1">
-                <a:solidFill>
-                  <a:srgbClr val="127A6E"/>
-                </a:solidFill>
-              </a:defRPr>
-            </a:pPr>
-            <a:r>
-              <a:t>read-coupled (~R: ≥3 reads tie each link)   AND   backbone-connected (~B: copies align reciprocally).</a:t>
-            </a:r>
-          </a:p>
-          <a:p>
-            <a:pPr>
-              <a:spcAft>
-                <a:spcPts val="1000"/>
-              </a:spcAft>
-              <a:defRPr sz="1000">
-                <a:solidFill>
-                  <a:srgbClr val="555555"/>
-                </a:solidFill>
-              </a:defRPr>
-            </a:pPr>
-          </a:p>
-          <a:p>
-            <a:pPr>
-              <a:spcAft>
-                <a:spcPts val="1000"/>
-              </a:spcAft>
-              <a:defRPr sz="1500">
-                <a:solidFill>
-                  <a:srgbClr val="555555"/>
-                </a:solidFill>
-              </a:defRPr>
-            </a:pPr>
-            <a:r>
-              <a:t>Built only from reads:  align → loci → count ties → ~R graph → components → exon-union copies → align → ~B → family.</a:t>
-            </a:r>
-          </a:p>
-        </p:txBody>
-      </p:sp>
-    </p:spTree>
-  </p:cSld>
-  <p:clrMapOvr>
-    <a:masterClrMapping/>
-  </p:clrMapOvr>
-</p:sld>
-</file>
-
-<file path=ppt/slides/slide8.xml><?xml version="1.0" encoding="utf-8"?>
-<p:sld xmlns:a="http://schemas.openxmlformats.org/drawingml/2006/main" xmlns:p="http://schemas.openxmlformats.org/presentationml/2006/main" xmlns:r="http://schemas.openxmlformats.org/officeDocument/2006/relationships">
-  <p:cSld>
-    <p:spTree>
-      <p:nvGrpSpPr>
-        <p:cNvPr id="1" name=""/>
-        <p:cNvGrpSpPr/>
-        <p:nvPr/>
-      </p:nvGrpSpPr>
-      <p:grpSpPr/>
+      <p:grpSpPr>
+        <a:xfrm>
+          <a:off x="0" y="0"/>
+          <a:ext cx="0" cy="0"/>
+          <a:chOff x="0" y="0"/>
+          <a:chExt cx="0" cy="0"/>
+        </a:xfrm>
+      </p:grpSpPr>
       <p:sp>
         <p:nvSpPr>
           <p:cNvPr id="2" name="TextBox 1"/>
@@ -4307,8 +4599,8 @@
 </p:sld>
 </file>
 
-<file path=ppt/slides/slide9.xml><?xml version="1.0" encoding="utf-8"?>
-<p:sld xmlns:a="http://schemas.openxmlformats.org/drawingml/2006/main" xmlns:p="http://schemas.openxmlformats.org/presentationml/2006/main" xmlns:r="http://schemas.openxmlformats.org/officeDocument/2006/relationships">
+<file path=ppt/slides/slide6.xml><?xml version="1.0" encoding="utf-8"?>
+<p:sld xmlns:a="http://schemas.openxmlformats.org/drawingml/2006/main" xmlns:r="http://schemas.openxmlformats.org/officeDocument/2006/relationships" xmlns:p="http://schemas.openxmlformats.org/presentationml/2006/main">
   <p:cSld>
     <p:spTree>
       <p:nvGrpSpPr>
@@ -4316,7 +4608,14 @@
         <p:cNvGrpSpPr/>
         <p:nvPr/>
       </p:nvGrpSpPr>
-      <p:grpSpPr/>
+      <p:grpSpPr>
+        <a:xfrm>
+          <a:off x="0" y="0"/>
+          <a:ext cx="0" cy="0"/>
+          <a:chOff x="0" y="0"/>
+          <a:chExt cx="0" cy="0"/>
+        </a:xfrm>
+      </p:grpSpPr>
       <p:sp>
         <p:nvSpPr>
           <p:cNvPr id="2" name="TextBox 1"/>
@@ -4347,19 +4646,19 @@
               </a:defRPr>
             </a:pPr>
             <a:r>
-              <a:t>Appendix — how it actually works</a:t>
+              <a:t>Part 2 — the complete family definition (~B)</a:t>
             </a:r>
           </a:p>
           <a:p>
             <a:pPr>
-              <a:defRPr sz="1700">
+              <a:defRPr sz="1600">
                 <a:solidFill>
                   <a:srgbClr val="555555"/>
                 </a:solidFill>
               </a:defRPr>
             </a:pPr>
             <a:r>
-              <a:t>what we align &amp; how we know what to align to · error vs. real difference · digesting a read into exons</a:t>
+              <a:t>~B DEFINES the family · all families, expressed or silent · good vs bad alignment · the named families it covers</a:t>
             </a:r>
           </a:p>
           <a:p>
@@ -4371,7 +4670,364 @@
               </a:defRPr>
             </a:pPr>
             <a:r>
-              <a:t>minimap2 does the ALIGNMENT (reads → placements, de, CIGAR — we do not implement an aligner). Our method is everything downstream — choosing WHAT to align, the two relations, the graph, the definition.</a:t>
+              <a:t>A family is a structural fact (~B): ~1,000 families, ~half expressed, ~half silent. Identifiability — resolving the copies — is the NEXT meeting (PSVs).</a:t>
+            </a:r>
+          </a:p>
+        </p:txBody>
+      </p:sp>
+    </p:spTree>
+  </p:cSld>
+  <p:clrMapOvr>
+    <a:masterClrMapping/>
+  </p:clrMapOvr>
+</p:sld>
+</file>
+
+<file path=ppt/slides/slide7.xml><?xml version="1.0" encoding="utf-8"?>
+<p:sld xmlns:a="http://schemas.openxmlformats.org/drawingml/2006/main" xmlns:r="http://schemas.openxmlformats.org/officeDocument/2006/relationships" xmlns:p="http://schemas.openxmlformats.org/presentationml/2006/main">
+  <p:cSld>
+    <p:spTree>
+      <p:nvGrpSpPr>
+        <p:cNvPr id="1" name=""/>
+        <p:cNvGrpSpPr/>
+        <p:nvPr/>
+      </p:nvGrpSpPr>
+      <p:grpSpPr>
+        <a:xfrm>
+          <a:off x="0" y="0"/>
+          <a:ext cx="0" cy="0"/>
+          <a:chOff x="0" y="0"/>
+          <a:chExt cx="0" cy="0"/>
+        </a:xfrm>
+      </p:grpSpPr>
+      <p:sp>
+        <p:nvSpPr>
+          <p:cNvPr id="2" name="TextBox 1"/>
+          <p:cNvSpPr txBox="1"/>
+          <p:nvPr/>
+        </p:nvSpPr>
+        <p:spPr>
+          <a:xfrm>
+            <a:off x="457200" y="164592"/>
+            <a:ext cx="11247120" cy="640080"/>
+          </a:xfrm>
+          <a:prstGeom prst="rect">
+            <a:avLst/>
+          </a:prstGeom>
+          <a:noFill/>
+        </p:spPr>
+        <p:txBody>
+          <a:bodyPr wrap="none">
+            <a:spAutoFit/>
+          </a:bodyPr>
+          <a:lstStyle/>
+          <a:p>
+            <a:pPr>
+              <a:defRPr sz="2400" b="1">
+                <a:solidFill>
+                  <a:srgbClr val="1F2D5A"/>
+                </a:solidFill>
+              </a:defRPr>
+            </a:pPr>
+            <a:r>
+              <a:t>The complete definition — ~B defines the family</a:t>
+            </a:r>
+          </a:p>
+        </p:txBody>
+      </p:sp>
+      <p:pic>
+        <p:nvPicPr>
+          <p:cNvPr id="3" name="Picture 2" descr="fig_complete.png"/>
+          <p:cNvPicPr>
+            <a:picLocks noChangeAspect="1"/>
+          </p:cNvPicPr>
+          <p:nvPr/>
+        </p:nvPicPr>
+        <p:blipFill>
+          <a:blip r:embed="rId2"/>
+          <a:stretch>
+            <a:fillRect/>
+          </a:stretch>
+        </p:blipFill>
+        <p:spPr>
+          <a:xfrm>
+            <a:off x="1536123" y="914400"/>
+            <a:ext cx="9116705" cy="4892040"/>
+          </a:xfrm>
+          <a:prstGeom prst="rect">
+            <a:avLst/>
+          </a:prstGeom>
+        </p:spPr>
+      </p:pic>
+      <p:sp>
+        <p:nvSpPr>
+          <p:cNvPr id="4" name="TextBox 3"/>
+          <p:cNvSpPr txBox="1"/>
+          <p:nvPr/>
+        </p:nvSpPr>
+        <p:spPr>
+          <a:xfrm>
+            <a:off x="548640" y="6080760"/>
+            <a:ext cx="11064240" cy="640080"/>
+          </a:xfrm>
+          <a:prstGeom prst="rect">
+            <a:avLst/>
+          </a:prstGeom>
+          <a:noFill/>
+        </p:spPr>
+        <p:txBody>
+          <a:bodyPr wrap="square">
+            <a:spAutoFit/>
+          </a:bodyPr>
+          <a:lstStyle/>
+          <a:p>
+            <a:pPr algn="ctr">
+              <a:defRPr sz="1500" b="1">
+                <a:solidFill>
+                  <a:srgbClr val="D96B27"/>
+                </a:solidFill>
+              </a:defRPr>
+            </a:pPr>
+            <a:r>
+              <a:t>~B (copies share a whole-gene backbone) DEFINES the family — a structural fact. Expression (495 seen / 518 silent) and identifiability (can we resolve the copies?) are LABELS, not gates. Identifiability is next meeting.</a:t>
+            </a:r>
+          </a:p>
+        </p:txBody>
+      </p:sp>
+    </p:spTree>
+  </p:cSld>
+  <p:clrMapOvr>
+    <a:masterClrMapping/>
+  </p:clrMapOvr>
+</p:sld>
+</file>
+
+<file path=ppt/slides/slide8.xml><?xml version="1.0" encoding="utf-8"?>
+<p:sld xmlns:a="http://schemas.openxmlformats.org/drawingml/2006/main" xmlns:r="http://schemas.openxmlformats.org/officeDocument/2006/relationships" xmlns:p="http://schemas.openxmlformats.org/presentationml/2006/main">
+  <p:cSld>
+    <p:spTree>
+      <p:nvGrpSpPr>
+        <p:cNvPr id="1" name=""/>
+        <p:cNvGrpSpPr/>
+        <p:nvPr/>
+      </p:nvGrpSpPr>
+      <p:grpSpPr>
+        <a:xfrm>
+          <a:off x="0" y="0"/>
+          <a:ext cx="0" cy="0"/>
+          <a:chOff x="0" y="0"/>
+          <a:chExt cx="0" cy="0"/>
+        </a:xfrm>
+      </p:grpSpPr>
+      <p:sp>
+        <p:nvSpPr>
+          <p:cNvPr id="2" name="TextBox 1"/>
+          <p:cNvSpPr txBox="1"/>
+          <p:nvPr/>
+        </p:nvSpPr>
+        <p:spPr>
+          <a:xfrm>
+            <a:off x="457200" y="164592"/>
+            <a:ext cx="11247120" cy="640080"/>
+          </a:xfrm>
+          <a:prstGeom prst="rect">
+            <a:avLst/>
+          </a:prstGeom>
+          <a:noFill/>
+        </p:spPr>
+        <p:txBody>
+          <a:bodyPr wrap="none">
+            <a:spAutoFit/>
+          </a:bodyPr>
+          <a:lstStyle/>
+          <a:p>
+            <a:pPr>
+              <a:defRPr sz="2400" b="1">
+                <a:solidFill>
+                  <a:srgbClr val="1F2D5A"/>
+                </a:solidFill>
+              </a:defRPr>
+            </a:pPr>
+            <a:r>
+              <a:t>Good vs bad ~B alignment — real dot-plots + the criteria</a:t>
+            </a:r>
+          </a:p>
+        </p:txBody>
+      </p:sp>
+      <p:pic>
+        <p:nvPicPr>
+          <p:cNvPr id="3" name="Picture 2" descr="fig_alncrit.png"/>
+          <p:cNvPicPr>
+            <a:picLocks noChangeAspect="1"/>
+          </p:cNvPicPr>
+          <p:nvPr/>
+        </p:nvPicPr>
+        <p:blipFill>
+          <a:blip r:embed="rId2"/>
+          <a:stretch>
+            <a:fillRect/>
+          </a:stretch>
+        </p:blipFill>
+        <p:spPr>
+          <a:xfrm>
+            <a:off x="1459243" y="914400"/>
+            <a:ext cx="9270466" cy="4892040"/>
+          </a:xfrm>
+          <a:prstGeom prst="rect">
+            <a:avLst/>
+          </a:prstGeom>
+        </p:spPr>
+      </p:pic>
+      <p:sp>
+        <p:nvSpPr>
+          <p:cNvPr id="4" name="TextBox 3"/>
+          <p:cNvSpPr txBox="1"/>
+          <p:nvPr/>
+        </p:nvSpPr>
+        <p:spPr>
+          <a:xfrm>
+            <a:off x="548640" y="6080760"/>
+            <a:ext cx="11064240" cy="640080"/>
+          </a:xfrm>
+          <a:prstGeom prst="rect">
+            <a:avLst/>
+          </a:prstGeom>
+          <a:noFill/>
+        </p:spPr>
+        <p:txBody>
+          <a:bodyPr wrap="square">
+            <a:spAutoFit/>
+          </a:bodyPr>
+          <a:lstStyle/>
+          <a:p>
+            <a:pPr algn="ctr">
+              <a:defRPr sz="1500" b="1">
+                <a:solidFill>
+                  <a:srgbClr val="D96B27"/>
+                </a:solidFill>
+              </a:defRPr>
+            </a:pPr>
+            <a:r>
+              <a:t>~B is a copy-vs-copy alignment. GOOD = one continuous diagonal over ≥30% of BOTH at ≥~85% id (array copies). BAD = a domain-only partial diagonal (CD200R1~CD200R1L), scatter, or — below ~80% id — no alignment (OCLN~SEPTIN7).</a:t>
+            </a:r>
+          </a:p>
+        </p:txBody>
+      </p:sp>
+    </p:spTree>
+  </p:cSld>
+  <p:clrMapOvr>
+    <a:masterClrMapping/>
+  </p:clrMapOvr>
+</p:sld>
+</file>
+
+<file path=ppt/slides/slide9.xml><?xml version="1.0" encoding="utf-8"?>
+<p:sld xmlns:a="http://schemas.openxmlformats.org/drawingml/2006/main" xmlns:r="http://schemas.openxmlformats.org/officeDocument/2006/relationships" xmlns:p="http://schemas.openxmlformats.org/presentationml/2006/main">
+  <p:cSld>
+    <p:spTree>
+      <p:nvGrpSpPr>
+        <p:cNvPr id="1" name=""/>
+        <p:cNvGrpSpPr/>
+        <p:nvPr/>
+      </p:nvGrpSpPr>
+      <p:grpSpPr>
+        <a:xfrm>
+          <a:off x="0" y="0"/>
+          <a:ext cx="0" cy="0"/>
+          <a:chOff x="0" y="0"/>
+          <a:chExt cx="0" cy="0"/>
+        </a:xfrm>
+      </p:grpSpPr>
+      <p:sp>
+        <p:nvSpPr>
+          <p:cNvPr id="2" name="TextBox 1"/>
+          <p:cNvSpPr txBox="1"/>
+          <p:nvPr/>
+        </p:nvSpPr>
+        <p:spPr>
+          <a:xfrm>
+            <a:off x="457200" y="164592"/>
+            <a:ext cx="11247120" cy="640080"/>
+          </a:xfrm>
+          <a:prstGeom prst="rect">
+            <a:avLst/>
+          </a:prstGeom>
+          <a:noFill/>
+        </p:spPr>
+        <p:txBody>
+          <a:bodyPr wrap="none">
+            <a:spAutoFit/>
+          </a:bodyPr>
+          <a:lstStyle/>
+          <a:p>
+            <a:pPr>
+              <a:defRPr sz="2400" b="1">
+                <a:solidFill>
+                  <a:srgbClr val="1F2D5A"/>
+                </a:solidFill>
+              </a:defRPr>
+            </a:pPr>
+            <a:r>
+              <a:t>From pairwise ~B to the family — a clique, not a chain</a:t>
+            </a:r>
+          </a:p>
+        </p:txBody>
+      </p:sp>
+      <p:pic>
+        <p:nvPicPr>
+          <p:cNvPr id="3" name="Picture 2" descr="fig_clique.png"/>
+          <p:cNvPicPr>
+            <a:picLocks noChangeAspect="1"/>
+          </p:cNvPicPr>
+          <p:nvPr/>
+        </p:nvPicPr>
+        <p:blipFill>
+          <a:blip r:embed="rId2"/>
+          <a:stretch>
+            <a:fillRect/>
+          </a:stretch>
+        </p:blipFill>
+        <p:spPr>
+          <a:xfrm>
+            <a:off x="1121855" y="914400"/>
+            <a:ext cx="9945241" cy="4892040"/>
+          </a:xfrm>
+          <a:prstGeom prst="rect">
+            <a:avLst/>
+          </a:prstGeom>
+        </p:spPr>
+      </p:pic>
+      <p:sp>
+        <p:nvSpPr>
+          <p:cNvPr id="4" name="TextBox 3"/>
+          <p:cNvSpPr txBox="1"/>
+          <p:nvPr/>
+        </p:nvSpPr>
+        <p:spPr>
+          <a:xfrm>
+            <a:off x="548640" y="6080760"/>
+            <a:ext cx="11064240" cy="640080"/>
+          </a:xfrm>
+          <a:prstGeom prst="rect">
+            <a:avLst/>
+          </a:prstGeom>
+          <a:noFill/>
+        </p:spPr>
+        <p:txBody>
+          <a:bodyPr wrap="square">
+            <a:spAutoFit/>
+          </a:bodyPr>
+          <a:lstStyle/>
+          <a:p>
+            <a:pPr algn="ctr">
+              <a:defRPr sz="1500" b="1">
+                <a:solidFill>
+                  <a:srgbClr val="D96B27"/>
+                </a:solidFill>
+              </a:defRPr>
+            </a:pPr>
+            <a:r>
+              <a:t>~B is pairwise; the family is the set whose members ALL mutually share a backbone (a clique / dense cluster). 81% of families are full cliques. A bridge member shares with only PART → it never joins the clique → cut, so a single bridge can't merge two families.</a:t>
             </a:r>
           </a:p>
         </p:txBody>
